--- a/docs/TournamentCam-Client-Pitch.pptx
+++ b/docs/TournamentCam-Client-Pitch.pptx
@@ -4,6 +4,9 @@
   <p:sldMasterIdLst>
     <p:sldMasterId id="2147483648" r:id="rId1"/>
   </p:sldMasterIdLst>
+  <p:notesMasterIdLst>
+    <p:notesMasterId r:id="rId12"/>
+  </p:notesMasterIdLst>
   <p:sldIdLst>
     <p:sldId id="256" r:id="rId2"/>
     <p:sldId id="257" r:id="rId3"/>
@@ -16,9 +19,6 @@
     <p:sldId id="264" r:id="rId10"/>
     <p:sldId id="265" r:id="rId11"/>
   </p:sldIdLst>
-  <p:notesMasterIdLst>
-    <p:notesMasterId r:id="rId12"/>
-  </p:notesMasterIdLst>
   <p:sldSz cx="12192000" cy="6858000"/>
   <p:notesSz cx="6858000" cy="12192000"/>
   <p:defaultTextStyle>
@@ -113,6 +113,11 @@
       </a:defRPr>
     </a:lvl9pPr>
   </p:defaultTextStyle>
+  <p:extLst>
+    <p:ext uri="{EFAFB233-063F-42B5-8137-9DF3F51BA10A}">
+      <p15:sldGuideLst xmlns:p15="http://schemas.microsoft.com/office/powerpoint/2012/main"/>
+    </p:ext>
+  </p:extLst>
 </p:presentation>
 </file>
 
@@ -138,234 +143,10 @@
           <a:chExt cx="0" cy="0"/>
         </a:xfrm>
       </p:grpSpPr>
-      <p:sp>
-        <p:nvSpPr>
-          <p:cNvPr id="2" name="Header Placeholder 1"/>
-          <p:cNvSpPr>
-            <a:spLocks noGrp="1"/>
-          </p:cNvSpPr>
-          <p:nvPr>
-            <p:ph type="hdr" sz="quarter"/>
-          </p:nvPr>
-        </p:nvSpPr>
-        <p:spPr>
-          <a:xfrm>
-            <a:off x="0" y="0"/>
-            <a:ext cx="2971800" cy="458788"/>
-          </a:xfrm>
-          <a:prstGeom prst="rect">
-            <a:avLst/>
-          </a:prstGeom>
-        </p:spPr>
-        <p:txBody>
-          <a:bodyPr vert="horz" lIns="91440" tIns="45720" rIns="91440" bIns="45720" rtlCol="0"/>
-          <a:lstStyle>
-            <a:lvl1pPr algn="l">
-              <a:defRPr sz="1200"/>
-            </a:lvl1pPr>
-          </a:lstStyle>
-          <a:p>
-            <a:endParaRPr lang="en-US"/>
-          </a:p>
-        </p:txBody>
-      </p:sp>
-      <p:sp>
-        <p:nvSpPr>
-          <p:cNvPr id="3" name="Date Placeholder 2"/>
-          <p:cNvSpPr>
-            <a:spLocks noGrp="1"/>
-          </p:cNvSpPr>
-          <p:nvPr>
-            <p:ph type="dt" idx="1"/>
-          </p:nvPr>
-        </p:nvSpPr>
-        <p:spPr>
-          <a:xfrm>
-            <a:off x="3884613" y="0"/>
-            <a:ext cx="2971800" cy="458788"/>
-          </a:xfrm>
-          <a:prstGeom prst="rect">
-            <a:avLst/>
-          </a:prstGeom>
-        </p:spPr>
-        <p:txBody>
-          <a:bodyPr vert="horz" lIns="91440" tIns="45720" rIns="91440" bIns="45720" rtlCol="0"/>
-          <a:lstStyle>
-            <a:lvl1pPr algn="r">
-              <a:defRPr sz="1200"/>
-            </a:lvl1pPr>
-          </a:lstStyle>
-          <a:p>
-            <a:fld id="{5282F153-3F37-0F45-9E97-73ACFA13230C}" type="datetimeFigureOut">
-              <a:rPr lang="en-US"/>
-              <a:t>7/23/19</a:t>
-            </a:fld>
-            <a:endParaRPr lang="en-US"/>
-          </a:p>
-        </p:txBody>
-      </p:sp>
-      <p:sp>
-        <p:nvSpPr>
-          <p:cNvPr id="4" name="Slide Image Placeholder 3"/>
-          <p:cNvSpPr>
-            <a:spLocks noGrp="1" noRot="1" noChangeAspect="1"/>
-          </p:cNvSpPr>
-          <p:nvPr>
-            <p:ph type="sldImg" idx="2"/>
-          </p:nvPr>
-        </p:nvSpPr>
-        <p:spPr>
-          <a:xfrm>
-            <a:off x="685800" y="1143000"/>
-            <a:ext cx="5486400" cy="3086100"/>
-          </a:xfrm>
-          <a:prstGeom prst="rect">
-            <a:avLst/>
-          </a:prstGeom>
-          <a:noFill/>
-          <a:ln w="12700">
-            <a:solidFill>
-              <a:prstClr val="black"/>
-            </a:solidFill>
-          </a:ln>
-        </p:spPr>
-        <p:txBody>
-          <a:bodyPr vert="horz" lIns="91440" tIns="45720" rIns="91440" bIns="45720" rtlCol="0" anchor="ctr"/>
-          <a:lstStyle/>
-          <a:p>
-            <a:endParaRPr lang="en-US"/>
-          </a:p>
-        </p:txBody>
-      </p:sp>
-      <p:sp>
-        <p:nvSpPr>
-          <p:cNvPr id="5" name="Notes Placeholder 4"/>
-          <p:cNvSpPr>
-            <a:spLocks noGrp="1"/>
-          </p:cNvSpPr>
-          <p:nvPr>
-            <p:ph type="body" sz="quarter" idx="3"/>
-          </p:nvPr>
-        </p:nvSpPr>
-        <p:spPr>
-          <a:xfrm>
-            <a:off x="685800" y="4400550"/>
-            <a:ext cx="5486400" cy="3600450"/>
-          </a:xfrm>
-          <a:prstGeom prst="rect">
-            <a:avLst/>
-          </a:prstGeom>
-        </p:spPr>
-        <p:txBody>
-          <a:bodyPr vert="horz" lIns="91440" tIns="45720" rIns="91440" bIns="45720" rtlCol="0"/>
-          <a:lstStyle/>
-          <a:p>
-            <a:pPr lvl="0"/>
-            <a:r>
-              <a:rPr lang="en-US"/>
-              <a:t>Click to edit Master text styles</a:t>
-            </a:r>
-          </a:p>
-          <a:p>
-            <a:pPr lvl="1"/>
-            <a:r>
-              <a:rPr lang="en-US"/>
-              <a:t>Second level</a:t>
-            </a:r>
-          </a:p>
-          <a:p>
-            <a:pPr lvl="2"/>
-            <a:r>
-              <a:rPr lang="en-US"/>
-              <a:t>Third level</a:t>
-            </a:r>
-          </a:p>
-          <a:p>
-            <a:pPr lvl="3"/>
-            <a:r>
-              <a:rPr lang="en-US"/>
-              <a:t>Fourth level</a:t>
-            </a:r>
-          </a:p>
-          <a:p>
-            <a:pPr lvl="4"/>
-            <a:r>
-              <a:rPr lang="en-US"/>
-              <a:t>Fifth level</a:t>
-            </a:r>
-          </a:p>
-        </p:txBody>
-      </p:sp>
-      <p:sp>
-        <p:nvSpPr>
-          <p:cNvPr id="6" name="Footer Placeholder 5"/>
-          <p:cNvSpPr>
-            <a:spLocks noGrp="1"/>
-          </p:cNvSpPr>
-          <p:nvPr>
-            <p:ph type="ftr" sz="quarter" idx="4"/>
-          </p:nvPr>
-        </p:nvSpPr>
-        <p:spPr>
-          <a:xfrm>
-            <a:off x="0" y="8685213"/>
-            <a:ext cx="2971800" cy="458787"/>
-          </a:xfrm>
-          <a:prstGeom prst="rect">
-            <a:avLst/>
-          </a:prstGeom>
-        </p:spPr>
-        <p:txBody>
-          <a:bodyPr vert="horz" lIns="91440" tIns="45720" rIns="91440" bIns="45720" rtlCol="0" anchor="b"/>
-          <a:lstStyle>
-            <a:lvl1pPr algn="l">
-              <a:defRPr sz="1200"/>
-            </a:lvl1pPr>
-          </a:lstStyle>
-          <a:p>
-            <a:endParaRPr lang="en-US"/>
-          </a:p>
-        </p:txBody>
-      </p:sp>
-      <p:sp>
-        <p:nvSpPr>
-          <p:cNvPr id="7" name="Slide Number Placeholder 6"/>
-          <p:cNvSpPr>
-            <a:spLocks noGrp="1"/>
-          </p:cNvSpPr>
-          <p:nvPr>
-            <p:ph type="sldNum" sz="quarter" idx="5"/>
-          </p:nvPr>
-        </p:nvSpPr>
-        <p:spPr>
-          <a:xfrm>
-            <a:off x="3884613" y="8685213"/>
-            <a:ext cx="2971800" cy="458787"/>
-          </a:xfrm>
-          <a:prstGeom prst="rect">
-            <a:avLst/>
-          </a:prstGeom>
-        </p:spPr>
-        <p:txBody>
-          <a:bodyPr vert="horz" lIns="91440" tIns="45720" rIns="91440" bIns="45720" rtlCol="0" anchor="b"/>
-          <a:lstStyle>
-            <a:lvl1pPr algn="r">
-              <a:defRPr sz="1200"/>
-            </a:lvl1pPr>
-          </a:lstStyle>
-          <a:p>
-            <a:fld id="{CE5E9CC1-C706-0F49-92D6-E571CC5EEA8F}" type="slidenum">
-              <a:rPr lang="en-US"/>
-              <a:t>‹#›</a:t>
-            </a:fld>
-            <a:endParaRPr lang="en-US"/>
-          </a:p>
-        </p:txBody>
-      </p:sp>
     </p:spTree>
     <p:extLst>
       <p:ext uri="{BB962C8B-B14F-4D97-AF65-F5344CB8AC3E}">
-        <p14:creationId xmlns:p14="http://schemas.microsoft.com/office/powerpoint/2010/main" val="1024086991"/>
+        <p14:creationId xmlns:p14="http://schemas.microsoft.com/office/powerpoint/2010/main" val="2310768879"/>
       </p:ext>
     </p:extLst>
   </p:cSld>
@@ -513,7 +294,6 @@
               <a:rPr lang="en-US" dirty="0"/>
               <a:t>Open with: Great rallies should not disappear when the match ends. TournamentCam helps a venue offer players a recording they can revisit and share. This is a working application prototype; we propose a one-court hardware pilot, not an already-certified commercial rollout.</a:t>
             </a:r>
-            <a:endParaRPr lang="en-US" dirty="0"/>
           </a:p>
         </p:txBody>
       </p:sp>
@@ -601,7 +381,6 @@
               <a:rPr lang="en-US" dirty="0"/>
               <a:t>Sources: https://usapickleball.org/rules/ ; https://usapickleball.org/rules/summary/ ; https://www.dahuawiki.com/index.php?curid=732&amp;title=Remote_Access%2FRTSP_via_VLC . Local documentation: docs/TECHNICAL.md, docs/USER-MANUAL.md, docs/FEATURES.md, docs/VALIDATION.md. Share recipients can retain downloaded copies after revocation. Follow the venue recording notice and consent practices.</a:t>
             </a:r>
-            <a:endParaRPr lang="en-US" dirty="0"/>
           </a:p>
         </p:txBody>
       </p:sp>
@@ -689,7 +468,6 @@
               <a:rPr lang="en-US" dirty="0"/>
               <a:t>These are player needs we propose validating with your customers, not claims from a completed market study. Ask which matters most to their players: memories, coaching or sharing.</a:t>
             </a:r>
-            <a:endParaRPr lang="en-US" dirty="0"/>
           </a:p>
         </p:txBody>
       </p:sp>
@@ -777,7 +555,6 @@
               <a:rPr lang="en-US" dirty="0"/>
               <a:t>Show a real recorded sample during a live demonstration, if available. Do not present a reference screenshot as a recording created by our app. Link expiry affects shared access, not file deletion.</a:t>
             </a:r>
-            <a:endParaRPr lang="en-US" dirty="0"/>
           </a:p>
         </p:txBody>
       </p:sp>
@@ -865,7 +642,6 @@
               <a:rPr lang="en-US" dirty="0"/>
               <a:t>The visual on this slide is a schematic, not an application screenshot. The app includes manual side-out scoring, server rotation, targets 11/15/21, win by two and undo. No automated line calls or ball tracking are claimed.</a:t>
             </a:r>
-            <a:endParaRPr lang="en-US" dirty="0"/>
           </a:p>
         </p:txBody>
       </p:sp>
@@ -953,7 +729,6 @@
               <a:rPr lang="en-US" dirty="0"/>
               <a:t>A 4K-capable NVR does not increase the resolution of a 2 MP camera. The app selects channels 1–16, but concurrent recording capacity needs load testing. Framing is manual; fixed cameras must be physically aimed. This version does not provide a live NVR preview in the browser, PTZ or automatic ball tracking. Trial mounting height is roughly 3–4 metres depending on lens and safe venue clearance, subject to installer assessment.</a:t>
             </a:r>
-            <a:endParaRPr lang="en-US" dirty="0"/>
           </a:p>
         </p:txBody>
       </p:sp>
@@ -1041,7 +816,6 @@
               <a:rPr lang="en-US" dirty="0"/>
               <a:t>Do not quote pricing or ROI without understanding venue operations and player demand. Discuss whether the operator prefers an add-on, included benefit or coaching package. Branded advertising, automatic highlights and tournament brackets are not current features.</a:t>
             </a:r>
-            <a:endParaRPr lang="en-US" dirty="0"/>
           </a:p>
         </p:txBody>
       </p:sp>
@@ -1129,7 +903,6 @@
               <a:rPr lang="en-US" dirty="0"/>
               <a:t>Build and seven automated tests passed, including scoring and server access/link behavior. Browser UI and real-camera end-to-end testing were not performed. API tests use a container-header fixture, not a decodable match recording. Not included: automatic highlights, AI tracking, PTZ, automatic email delivery, historical NVR archive import or exported clip editing.</a:t>
             </a:r>
-            <a:endParaRPr lang="en-US" dirty="0"/>
           </a:p>
         </p:txBody>
       </p:sp>
@@ -1217,7 +990,6 @@
               <a:rPr lang="en-US" dirty="0"/>
               <a:t>Suggested pilot acceptance journey: start a real match, stop and finalize, play and seek, download, open a share link on a separate device, revoke it, and recover from network interruption. Define measurable thresholds with the client before starting. Avoid promising a fixed launch date until access and hardware are confirmed.</a:t>
             </a:r>
-            <a:endParaRPr lang="en-US" dirty="0"/>
           </a:p>
         </p:txBody>
       </p:sp>
@@ -1305,7 +1077,6 @@
               <a:rPr lang="en-US" dirty="0"/>
               <a:t>Close by asking: Would you be open to a one-court pilot, with success measured by reliable recordings, easy player access and whether players value the experience? Ask for exact camera and NVR models, the venue technical contact and a suitable pilot court.</a:t>
             </a:r>
-            <a:endParaRPr lang="en-US" dirty="0"/>
           </a:p>
         </p:txBody>
       </p:sp>
@@ -1378,6 +1149,11 @@
 <file path=ppt/slideMasters/slideMaster1.xml><?xml version="1.0" encoding="utf-8"?>
 <p:sldMaster xmlns:a="http://schemas.openxmlformats.org/drawingml/2006/main" xmlns:r="http://schemas.openxmlformats.org/officeDocument/2006/relationships" xmlns:p="http://schemas.openxmlformats.org/presentationml/2006/main">
   <p:cSld>
+    <p:bg>
+      <p:bgRef idx="1001">
+        <a:schemeClr val="bg1"/>
+      </p:bgRef>
+    </p:bg>
     <p:spTree>
       <p:nvGrpSpPr>
         <p:cNvPr id="1" name=""/>
@@ -1660,6 +1436,7 @@
         <a:solidFill>
           <a:srgbClr val="112E27"/>
         </a:solidFill>
+        <a:effectLst/>
       </p:bgPr>
     </p:bg>
     <p:spTree>
@@ -1697,11 +1474,11 @@
           <a:bodyPr wrap="square" lIns="0" tIns="0" rIns="0" bIns="0" rtlCol="0" anchor="ctr"/>
           <a:lstStyle/>
           <a:p>
-            <a:pPr indent="0" marL="0">
-              <a:buNone/>
-            </a:pPr>
-            <a:r>
-              <a:rPr lang="en-US" sz="1200" b="1" spc="200" kern="0" dirty="0">
+            <a:pPr marL="0" indent="0">
+              <a:buNone/>
+            </a:pPr>
+            <a:r>
+              <a:rPr lang="en-US" sz="1200" b="1" kern="0" spc="200" dirty="0">
                 <a:solidFill>
                   <a:srgbClr val="D3F783"/>
                 </a:solidFill>
@@ -1736,11 +1513,11 @@
           <a:bodyPr wrap="square" lIns="0" tIns="0" rIns="0" bIns="0" rtlCol="0" anchor="ctr"/>
           <a:lstStyle/>
           <a:p>
-            <a:pPr algn="r" indent="0" marL="0">
-              <a:buNone/>
-            </a:pPr>
-            <a:r>
-              <a:rPr lang="en-US" sz="1000" spc="150" kern="0" dirty="0">
+            <a:pPr marL="0" indent="0" algn="r">
+              <a:buNone/>
+            </a:pPr>
+            <a:r>
+              <a:rPr lang="en-US" sz="1000" kern="0" spc="150" dirty="0">
                 <a:solidFill>
                   <a:srgbClr val="9DB6A8"/>
                 </a:solidFill>
@@ -1778,6 +1555,13 @@
             <a:prstDash val="solid"/>
           </a:ln>
         </p:spPr>
+        <p:txBody>
+          <a:bodyPr/>
+          <a:lstStyle/>
+          <a:p>
+            <a:endParaRPr lang="en-US"/>
+          </a:p>
+        </p:txBody>
       </p:sp>
       <p:sp>
         <p:nvSpPr>
@@ -1800,7 +1584,7 @@
           <a:bodyPr wrap="square" lIns="0" tIns="0" rIns="0" bIns="0" rtlCol="0" anchor="ctr"/>
           <a:lstStyle/>
           <a:p>
-            <a:pPr indent="0" marL="0">
+            <a:pPr marL="0" indent="0">
               <a:buNone/>
             </a:pPr>
             <a:r>
@@ -1839,7 +1623,7 @@
           <a:bodyPr wrap="square" lIns="0" tIns="0" rIns="0" bIns="0" rtlCol="0" anchor="ctr"/>
           <a:lstStyle/>
           <a:p>
-            <a:pPr algn="r" indent="0" marL="0">
+            <a:pPr marL="0" indent="0" algn="r">
               <a:buNone/>
             </a:pPr>
             <a:r>
@@ -1878,7 +1662,7 @@
           <a:bodyPr wrap="square" lIns="0" tIns="0" rIns="0" bIns="0" rtlCol="0" anchor="ctr"/>
           <a:lstStyle/>
           <a:p>
-            <a:pPr indent="0" marL="0">
+            <a:pPr marL="0" indent="0">
               <a:lnSpc>
                 <a:spcPct val="102000"/>
               </a:lnSpc>
@@ -1898,7 +1682,7 @@
             <a:endParaRPr lang="en-US" sz="4600" dirty="0"/>
           </a:p>
           <a:p>
-            <a:pPr indent="0" marL="0">
+            <a:pPr marL="0" indent="0">
               <a:lnSpc>
                 <a:spcPct val="102000"/>
               </a:lnSpc>
@@ -1940,7 +1724,7 @@
           <a:bodyPr wrap="square" lIns="0" tIns="0" rIns="0" bIns="0" rtlCol="0" anchor="ctr"/>
           <a:lstStyle/>
           <a:p>
-            <a:pPr indent="0" marL="0">
+            <a:pPr marL="0" indent="0">
               <a:buNone/>
             </a:pPr>
             <a:r>
@@ -1957,7 +1741,7 @@
             <a:endParaRPr lang="en-US" sz="2300" dirty="0"/>
           </a:p>
           <a:p>
-            <a:pPr indent="0" marL="0">
+            <a:pPr marL="0" indent="0">
               <a:buNone/>
             </a:pPr>
             <a:r>
@@ -1999,6 +1783,13 @@
             <a:prstDash val="solid"/>
           </a:ln>
         </p:spPr>
+        <p:txBody>
+          <a:bodyPr/>
+          <a:lstStyle/>
+          <a:p>
+            <a:endParaRPr lang="en-US"/>
+          </a:p>
+        </p:txBody>
       </p:sp>
       <p:sp>
         <p:nvSpPr>
@@ -2008,7 +1799,7 @@
         </p:nvSpPr>
         <p:spPr>
           <a:xfrm>
-            <a:off x="804672" y="5138928"/>
+            <a:off x="804672" y="5202936"/>
             <a:ext cx="3337560" cy="182880"/>
           </a:xfrm>
           <a:prstGeom prst="rect">
@@ -2021,7 +1812,7 @@
           <a:bodyPr wrap="square" lIns="0" tIns="0" rIns="0" bIns="0" rtlCol="0" anchor="ctr"/>
           <a:lstStyle/>
           <a:p>
-            <a:pPr indent="0" marL="0">
+            <a:pPr marL="0" indent="0">
               <a:buNone/>
             </a:pPr>
             <a:r>
@@ -2063,6 +1854,13 @@
             <a:prstDash val="solid"/>
           </a:ln>
         </p:spPr>
+        <p:txBody>
+          <a:bodyPr/>
+          <a:lstStyle/>
+          <a:p>
+            <a:endParaRPr lang="en-US"/>
+          </a:p>
+        </p:txBody>
       </p:sp>
       <p:sp>
         <p:nvSpPr>
@@ -2088,6 +1886,13 @@
             <a:prstDash val="solid"/>
           </a:ln>
         </p:spPr>
+        <p:txBody>
+          <a:bodyPr/>
+          <a:lstStyle/>
+          <a:p>
+            <a:endParaRPr lang="en-US"/>
+          </a:p>
+        </p:txBody>
       </p:sp>
       <p:sp>
         <p:nvSpPr>
@@ -2113,6 +1918,13 @@
             <a:prstDash val="solid"/>
           </a:ln>
         </p:spPr>
+        <p:txBody>
+          <a:bodyPr/>
+          <a:lstStyle/>
+          <a:p>
+            <a:endParaRPr lang="en-US"/>
+          </a:p>
+        </p:txBody>
       </p:sp>
       <p:sp>
         <p:nvSpPr>
@@ -2136,6 +1948,13 @@
             <a:prstDash val="solid"/>
           </a:ln>
         </p:spPr>
+        <p:txBody>
+          <a:bodyPr/>
+          <a:lstStyle/>
+          <a:p>
+            <a:endParaRPr lang="en-US"/>
+          </a:p>
+        </p:txBody>
       </p:sp>
       <p:sp>
         <p:nvSpPr>
@@ -2159,6 +1978,13 @@
             <a:prstDash val="solid"/>
           </a:ln>
         </p:spPr>
+        <p:txBody>
+          <a:bodyPr/>
+          <a:lstStyle/>
+          <a:p>
+            <a:endParaRPr lang="en-US"/>
+          </a:p>
+        </p:txBody>
       </p:sp>
       <p:sp>
         <p:nvSpPr>
@@ -2182,6 +2008,13 @@
             <a:prstDash val="dash"/>
           </a:ln>
         </p:spPr>
+        <p:txBody>
+          <a:bodyPr/>
+          <a:lstStyle/>
+          <a:p>
+            <a:endParaRPr lang="en-US"/>
+          </a:p>
+        </p:txBody>
       </p:sp>
       <p:sp>
         <p:nvSpPr>
@@ -2204,7 +2037,7 @@
           <a:bodyPr wrap="square" lIns="0" tIns="0" rIns="0" bIns="0" rtlCol="0" anchor="ctr"/>
           <a:lstStyle/>
           <a:p>
-            <a:pPr algn="ctr" indent="0" marL="0">
+            <a:pPr marL="0" indent="0" algn="ctr">
               <a:buNone/>
             </a:pPr>
             <a:r>
@@ -2238,6 +2071,7 @@
         <a:solidFill>
           <a:srgbClr val="F5F7F2"/>
         </a:solidFill>
+        <a:effectLst/>
       </p:bgPr>
     </p:bg>
     <p:spTree>
@@ -2275,11 +2109,11 @@
           <a:bodyPr wrap="square" lIns="0" tIns="0" rIns="0" bIns="0" rtlCol="0" anchor="ctr"/>
           <a:lstStyle/>
           <a:p>
-            <a:pPr indent="0" marL="0">
-              <a:buNone/>
-            </a:pPr>
-            <a:r>
-              <a:rPr lang="en-US" sz="1200" b="1" spc="200" kern="0" dirty="0">
+            <a:pPr marL="0" indent="0">
+              <a:buNone/>
+            </a:pPr>
+            <a:r>
+              <a:rPr lang="en-US" sz="1200" b="1" kern="0" spc="200" dirty="0">
                 <a:solidFill>
                   <a:srgbClr val="174D3B"/>
                 </a:solidFill>
@@ -2314,11 +2148,11 @@
           <a:bodyPr wrap="square" lIns="0" tIns="0" rIns="0" bIns="0" rtlCol="0" anchor="ctr"/>
           <a:lstStyle/>
           <a:p>
-            <a:pPr algn="r" indent="0" marL="0">
-              <a:buNone/>
-            </a:pPr>
-            <a:r>
-              <a:rPr lang="en-US" sz="1000" spc="150" kern="0" dirty="0">
+            <a:pPr marL="0" indent="0" algn="r">
+              <a:buNone/>
+            </a:pPr>
+            <a:r>
+              <a:rPr lang="en-US" sz="1000" kern="0" spc="150" dirty="0">
                 <a:solidFill>
                   <a:srgbClr val="718478"/>
                 </a:solidFill>
@@ -2356,6 +2190,13 @@
             <a:prstDash val="solid"/>
           </a:ln>
         </p:spPr>
+        <p:txBody>
+          <a:bodyPr/>
+          <a:lstStyle/>
+          <a:p>
+            <a:endParaRPr lang="en-US"/>
+          </a:p>
+        </p:txBody>
       </p:sp>
       <p:sp>
         <p:nvSpPr>
@@ -2378,7 +2219,7 @@
           <a:bodyPr wrap="square" lIns="0" tIns="0" rIns="0" bIns="0" rtlCol="0" anchor="ctr"/>
           <a:lstStyle/>
           <a:p>
-            <a:pPr indent="0" marL="0">
+            <a:pPr marL="0" indent="0">
               <a:buNone/>
             </a:pPr>
             <a:r>
@@ -2417,7 +2258,7 @@
           <a:bodyPr wrap="square" lIns="0" tIns="0" rIns="0" bIns="0" rtlCol="0" anchor="ctr"/>
           <a:lstStyle/>
           <a:p>
-            <a:pPr algn="r" indent="0" marL="0">
+            <a:pPr marL="0" indent="0" algn="r">
               <a:buNone/>
             </a:pPr>
             <a:r>
@@ -2456,11 +2297,11 @@
           <a:bodyPr wrap="square" lIns="0" tIns="0" rIns="0" bIns="0" rtlCol="0" anchor="ctr"/>
           <a:lstStyle/>
           <a:p>
-            <a:pPr indent="0" marL="0">
-              <a:buNone/>
-            </a:pPr>
-            <a:r>
-              <a:rPr lang="en-US" sz="1200" b="1" spc="200" kern="0" dirty="0">
+            <a:pPr marL="0" indent="0">
+              <a:buNone/>
+            </a:pPr>
+            <a:r>
+              <a:rPr lang="en-US" sz="1200" b="1" kern="0" spc="200" dirty="0">
                 <a:solidFill>
                   <a:srgbClr val="174D3B"/>
                 </a:solidFill>
@@ -2495,7 +2336,7 @@
           <a:bodyPr wrap="square" lIns="0" tIns="0" rIns="0" bIns="0" rtlCol="0" anchor="ctr"/>
           <a:lstStyle/>
           <a:p>
-            <a:pPr indent="0" marL="0">
+            <a:pPr marL="0" indent="0">
               <a:buNone/>
             </a:pPr>
             <a:r>
@@ -2534,7 +2375,7 @@
           <a:bodyPr wrap="square" lIns="0" tIns="0" rIns="0" bIns="0" rtlCol="0" anchor="ctr"/>
           <a:lstStyle/>
           <a:p>
-            <a:pPr indent="0" marL="0">
+            <a:pPr marL="0" indent="0">
               <a:buNone/>
             </a:pPr>
             <a:r>
@@ -2573,7 +2414,7 @@
           <a:bodyPr wrap="square" lIns="0" tIns="0" rIns="0" bIns="0" rtlCol="0" anchor="ctr"/>
           <a:lstStyle/>
           <a:p>
-            <a:pPr indent="0" marL="0">
+            <a:pPr marL="0" indent="0">
               <a:buNone/>
             </a:pPr>
             <a:r>
@@ -2612,7 +2453,7 @@
           <a:bodyPr wrap="square" lIns="0" tIns="0" rIns="0" bIns="0" rtlCol="0" anchor="ctr"/>
           <a:lstStyle/>
           <a:p>
-            <a:pPr indent="0" marL="0">
+            <a:pPr marL="0" indent="0">
               <a:buNone/>
             </a:pPr>
             <a:r>
@@ -2629,7 +2470,7 @@
             <a:endParaRPr lang="en-US" sz="1700" dirty="0"/>
           </a:p>
           <a:p>
-            <a:pPr indent="0" marL="0">
+            <a:pPr marL="0" indent="0">
               <a:buNone/>
             </a:pPr>
             <a:r>
@@ -2646,7 +2487,7 @@
             <a:endParaRPr lang="en-US" sz="1700" dirty="0"/>
           </a:p>
           <a:p>
-            <a:pPr indent="0" marL="0">
+            <a:pPr marL="0" indent="0">
               <a:buNone/>
             </a:pPr>
             <a:r>
@@ -2663,7 +2504,7 @@
             <a:endParaRPr lang="en-US" sz="1700" dirty="0"/>
           </a:p>
           <a:p>
-            <a:pPr indent="0" marL="0">
+            <a:pPr marL="0" indent="0">
               <a:buNone/>
             </a:pPr>
             <a:r>
@@ -2702,7 +2543,7 @@
           <a:bodyPr wrap="square" lIns="0" tIns="0" rIns="0" bIns="0" rtlCol="0" anchor="ctr"/>
           <a:lstStyle/>
           <a:p>
-            <a:pPr indent="0" marL="0">
+            <a:pPr marL="0" indent="0">
               <a:buNone/>
             </a:pPr>
             <a:r>
@@ -2741,7 +2582,7 @@
           <a:bodyPr wrap="square" lIns="0" tIns="0" rIns="0" bIns="0" rtlCol="0" anchor="ctr"/>
           <a:lstStyle/>
           <a:p>
-            <a:pPr indent="0" marL="0">
+            <a:pPr marL="0" indent="0">
               <a:buNone/>
             </a:pPr>
             <a:r>
@@ -2758,7 +2599,7 @@
             <a:endParaRPr lang="en-US" sz="1700" dirty="0"/>
           </a:p>
           <a:p>
-            <a:pPr indent="0" marL="0">
+            <a:pPr marL="0" indent="0">
               <a:buNone/>
             </a:pPr>
             <a:r>
@@ -2775,7 +2616,7 @@
             <a:endParaRPr lang="en-US" sz="1700" dirty="0"/>
           </a:p>
           <a:p>
-            <a:pPr indent="0" marL="0">
+            <a:pPr marL="0" indent="0">
               <a:buNone/>
             </a:pPr>
             <a:r>
@@ -2792,7 +2633,7 @@
             <a:endParaRPr lang="en-US" sz="1700" dirty="0"/>
           </a:p>
           <a:p>
-            <a:pPr indent="0" marL="0">
+            <a:pPr marL="0" indent="0">
               <a:buNone/>
             </a:pPr>
             <a:r>
@@ -2831,7 +2672,7 @@
           <a:bodyPr wrap="square" lIns="0" tIns="0" rIns="0" bIns="0" rtlCol="0" anchor="ctr"/>
           <a:lstStyle/>
           <a:p>
-            <a:pPr indent="0" marL="0">
+            <a:pPr marL="0" indent="0">
               <a:buNone/>
             </a:pPr>
             <a:r>
@@ -2865,6 +2706,7 @@
         <a:solidFill>
           <a:srgbClr val="F5F7F2"/>
         </a:solidFill>
+        <a:effectLst/>
       </p:bgPr>
     </p:bg>
     <p:spTree>
@@ -2902,11 +2744,11 @@
           <a:bodyPr wrap="square" lIns="0" tIns="0" rIns="0" bIns="0" rtlCol="0" anchor="ctr"/>
           <a:lstStyle/>
           <a:p>
-            <a:pPr indent="0" marL="0">
-              <a:buNone/>
-            </a:pPr>
-            <a:r>
-              <a:rPr lang="en-US" sz="1200" b="1" spc="200" kern="0" dirty="0">
+            <a:pPr marL="0" indent="0">
+              <a:buNone/>
+            </a:pPr>
+            <a:r>
+              <a:rPr lang="en-US" sz="1200" b="1" kern="0" spc="200" dirty="0">
                 <a:solidFill>
                   <a:srgbClr val="174D3B"/>
                 </a:solidFill>
@@ -2941,11 +2783,11 @@
           <a:bodyPr wrap="square" lIns="0" tIns="0" rIns="0" bIns="0" rtlCol="0" anchor="ctr"/>
           <a:lstStyle/>
           <a:p>
-            <a:pPr algn="r" indent="0" marL="0">
-              <a:buNone/>
-            </a:pPr>
-            <a:r>
-              <a:rPr lang="en-US" sz="1000" spc="150" kern="0" dirty="0">
+            <a:pPr marL="0" indent="0" algn="r">
+              <a:buNone/>
+            </a:pPr>
+            <a:r>
+              <a:rPr lang="en-US" sz="1000" kern="0" spc="150" dirty="0">
                 <a:solidFill>
                   <a:srgbClr val="718478"/>
                 </a:solidFill>
@@ -2983,6 +2825,13 @@
             <a:prstDash val="solid"/>
           </a:ln>
         </p:spPr>
+        <p:txBody>
+          <a:bodyPr/>
+          <a:lstStyle/>
+          <a:p>
+            <a:endParaRPr lang="en-US"/>
+          </a:p>
+        </p:txBody>
       </p:sp>
       <p:sp>
         <p:nvSpPr>
@@ -3005,7 +2854,7 @@
           <a:bodyPr wrap="square" lIns="0" tIns="0" rIns="0" bIns="0" rtlCol="0" anchor="ctr"/>
           <a:lstStyle/>
           <a:p>
-            <a:pPr indent="0" marL="0">
+            <a:pPr marL="0" indent="0">
               <a:buNone/>
             </a:pPr>
             <a:r>
@@ -3044,7 +2893,7 @@
           <a:bodyPr wrap="square" lIns="0" tIns="0" rIns="0" bIns="0" rtlCol="0" anchor="ctr"/>
           <a:lstStyle/>
           <a:p>
-            <a:pPr algn="r" indent="0" marL="0">
+            <a:pPr marL="0" indent="0" algn="r">
               <a:buNone/>
             </a:pPr>
             <a:r>
@@ -3083,11 +2932,11 @@
           <a:bodyPr wrap="square" lIns="0" tIns="0" rIns="0" bIns="0" rtlCol="0" anchor="ctr"/>
           <a:lstStyle/>
           <a:p>
-            <a:pPr indent="0" marL="0">
-              <a:buNone/>
-            </a:pPr>
-            <a:r>
-              <a:rPr lang="en-US" sz="1200" b="1" spc="200" kern="0" dirty="0">
+            <a:pPr marL="0" indent="0">
+              <a:buNone/>
+            </a:pPr>
+            <a:r>
+              <a:rPr lang="en-US" sz="1200" b="1" kern="0" spc="200" dirty="0">
                 <a:solidFill>
                   <a:srgbClr val="174D3B"/>
                 </a:solidFill>
@@ -3122,7 +2971,7 @@
           <a:bodyPr wrap="square" lIns="0" tIns="0" rIns="0" bIns="0" rtlCol="0" anchor="ctr"/>
           <a:lstStyle/>
           <a:p>
-            <a:pPr indent="0" marL="0">
+            <a:pPr marL="0" indent="0">
               <a:buNone/>
             </a:pPr>
             <a:r>
@@ -3161,7 +3010,7 @@
           <a:bodyPr wrap="square" lIns="0" tIns="0" rIns="0" bIns="0" rtlCol="0" anchor="ctr"/>
           <a:lstStyle/>
           <a:p>
-            <a:pPr indent="0" marL="0">
+            <a:pPr marL="0" indent="0">
               <a:buNone/>
             </a:pPr>
             <a:r>
@@ -3203,6 +3052,13 @@
             <a:prstDash val="solid"/>
           </a:ln>
         </p:spPr>
+        <p:txBody>
+          <a:bodyPr/>
+          <a:lstStyle/>
+          <a:p>
+            <a:endParaRPr lang="en-US"/>
+          </a:p>
+        </p:txBody>
       </p:sp>
       <p:sp>
         <p:nvSpPr>
@@ -3225,11 +3081,11 @@
           <a:bodyPr wrap="square" lIns="0" tIns="0" rIns="0" bIns="0" rtlCol="0" anchor="ctr"/>
           <a:lstStyle/>
           <a:p>
-            <a:pPr indent="0" marL="0">
-              <a:buNone/>
-            </a:pPr>
-            <a:r>
-              <a:rPr lang="en-US" sz="1100" b="1" spc="100" kern="0" dirty="0">
+            <a:pPr marL="0" indent="0">
+              <a:buNone/>
+            </a:pPr>
+            <a:r>
+              <a:rPr lang="en-US" sz="1100" b="1" kern="0" spc="100" dirty="0">
                 <a:solidFill>
                   <a:srgbClr val="174D3B"/>
                 </a:solidFill>
@@ -3264,7 +3120,7 @@
           <a:bodyPr wrap="square" lIns="0" tIns="0" rIns="0" bIns="0" rtlCol="0" anchor="ctr"/>
           <a:lstStyle/>
           <a:p>
-            <a:pPr indent="0" marL="0">
+            <a:pPr marL="0" indent="0">
               <a:buNone/>
             </a:pPr>
             <a:r>
@@ -3303,7 +3159,7 @@
           <a:bodyPr wrap="square" lIns="0" tIns="0" rIns="0" bIns="0" rtlCol="0" anchor="ctr"/>
           <a:lstStyle/>
           <a:p>
-            <a:pPr indent="0" marL="0">
+            <a:pPr marL="0" indent="0">
               <a:buNone/>
             </a:pPr>
             <a:r>
@@ -3345,6 +3201,13 @@
             <a:prstDash val="solid"/>
           </a:ln>
         </p:spPr>
+        <p:txBody>
+          <a:bodyPr/>
+          <a:lstStyle/>
+          <a:p>
+            <a:endParaRPr lang="en-US"/>
+          </a:p>
+        </p:txBody>
       </p:sp>
       <p:sp>
         <p:nvSpPr>
@@ -3367,11 +3230,11 @@
           <a:bodyPr wrap="square" lIns="0" tIns="0" rIns="0" bIns="0" rtlCol="0" anchor="ctr"/>
           <a:lstStyle/>
           <a:p>
-            <a:pPr indent="0" marL="0">
-              <a:buNone/>
-            </a:pPr>
-            <a:r>
-              <a:rPr lang="en-US" sz="1100" b="1" spc="100" kern="0" dirty="0">
+            <a:pPr marL="0" indent="0">
+              <a:buNone/>
+            </a:pPr>
+            <a:r>
+              <a:rPr lang="en-US" sz="1100" b="1" kern="0" spc="100" dirty="0">
                 <a:solidFill>
                   <a:srgbClr val="174D3B"/>
                 </a:solidFill>
@@ -3406,7 +3269,7 @@
           <a:bodyPr wrap="square" lIns="0" tIns="0" rIns="0" bIns="0" rtlCol="0" anchor="ctr"/>
           <a:lstStyle/>
           <a:p>
-            <a:pPr indent="0" marL="0">
+            <a:pPr marL="0" indent="0">
               <a:buNone/>
             </a:pPr>
             <a:r>
@@ -3445,7 +3308,7 @@
           <a:bodyPr wrap="square" lIns="0" tIns="0" rIns="0" bIns="0" rtlCol="0" anchor="ctr"/>
           <a:lstStyle/>
           <a:p>
-            <a:pPr indent="0" marL="0">
+            <a:pPr marL="0" indent="0">
               <a:buNone/>
             </a:pPr>
             <a:r>
@@ -3487,6 +3350,13 @@
             <a:prstDash val="solid"/>
           </a:ln>
         </p:spPr>
+        <p:txBody>
+          <a:bodyPr/>
+          <a:lstStyle/>
+          <a:p>
+            <a:endParaRPr lang="en-US"/>
+          </a:p>
+        </p:txBody>
       </p:sp>
       <p:sp>
         <p:nvSpPr>
@@ -3509,11 +3379,11 @@
           <a:bodyPr wrap="square" lIns="0" tIns="0" rIns="0" bIns="0" rtlCol="0" anchor="ctr"/>
           <a:lstStyle/>
           <a:p>
-            <a:pPr indent="0" marL="0">
-              <a:buNone/>
-            </a:pPr>
-            <a:r>
-              <a:rPr lang="en-US" sz="1100" b="1" spc="100" kern="0" dirty="0">
+            <a:pPr marL="0" indent="0">
+              <a:buNone/>
+            </a:pPr>
+            <a:r>
+              <a:rPr lang="en-US" sz="1100" b="1" kern="0" spc="100" dirty="0">
                 <a:solidFill>
                   <a:srgbClr val="174D3B"/>
                 </a:solidFill>
@@ -3548,7 +3418,7 @@
           <a:bodyPr wrap="square" lIns="0" tIns="0" rIns="0" bIns="0" rtlCol="0" anchor="ctr"/>
           <a:lstStyle/>
           <a:p>
-            <a:pPr indent="0" marL="0">
+            <a:pPr marL="0" indent="0">
               <a:buNone/>
             </a:pPr>
             <a:r>
@@ -3587,7 +3457,7 @@
           <a:bodyPr wrap="square" lIns="0" tIns="0" rIns="0" bIns="0" rtlCol="0" anchor="ctr"/>
           <a:lstStyle/>
           <a:p>
-            <a:pPr indent="0" marL="0">
+            <a:pPr marL="0" indent="0">
               <a:buNone/>
             </a:pPr>
             <a:r>
@@ -3621,6 +3491,7 @@
         <a:solidFill>
           <a:srgbClr val="F5F7F2"/>
         </a:solidFill>
+        <a:effectLst/>
       </p:bgPr>
     </p:bg>
     <p:spTree>
@@ -3658,11 +3529,11 @@
           <a:bodyPr wrap="square" lIns="0" tIns="0" rIns="0" bIns="0" rtlCol="0" anchor="ctr"/>
           <a:lstStyle/>
           <a:p>
-            <a:pPr indent="0" marL="0">
-              <a:buNone/>
-            </a:pPr>
-            <a:r>
-              <a:rPr lang="en-US" sz="1200" b="1" spc="200" kern="0" dirty="0">
+            <a:pPr marL="0" indent="0">
+              <a:buNone/>
+            </a:pPr>
+            <a:r>
+              <a:rPr lang="en-US" sz="1200" b="1" kern="0" spc="200" dirty="0">
                 <a:solidFill>
                   <a:srgbClr val="174D3B"/>
                 </a:solidFill>
@@ -3697,11 +3568,11 @@
           <a:bodyPr wrap="square" lIns="0" tIns="0" rIns="0" bIns="0" rtlCol="0" anchor="ctr"/>
           <a:lstStyle/>
           <a:p>
-            <a:pPr algn="r" indent="0" marL="0">
-              <a:buNone/>
-            </a:pPr>
-            <a:r>
-              <a:rPr lang="en-US" sz="1000" spc="150" kern="0" dirty="0">
+            <a:pPr marL="0" indent="0" algn="r">
+              <a:buNone/>
+            </a:pPr>
+            <a:r>
+              <a:rPr lang="en-US" sz="1000" kern="0" spc="150" dirty="0">
                 <a:solidFill>
                   <a:srgbClr val="718478"/>
                 </a:solidFill>
@@ -3739,6 +3610,13 @@
             <a:prstDash val="solid"/>
           </a:ln>
         </p:spPr>
+        <p:txBody>
+          <a:bodyPr/>
+          <a:lstStyle/>
+          <a:p>
+            <a:endParaRPr lang="en-US"/>
+          </a:p>
+        </p:txBody>
       </p:sp>
       <p:sp>
         <p:nvSpPr>
@@ -3761,7 +3639,7 @@
           <a:bodyPr wrap="square" lIns="0" tIns="0" rIns="0" bIns="0" rtlCol="0" anchor="ctr"/>
           <a:lstStyle/>
           <a:p>
-            <a:pPr indent="0" marL="0">
+            <a:pPr marL="0" indent="0">
               <a:buNone/>
             </a:pPr>
             <a:r>
@@ -3800,7 +3678,7 @@
           <a:bodyPr wrap="square" lIns="0" tIns="0" rIns="0" bIns="0" rtlCol="0" anchor="ctr"/>
           <a:lstStyle/>
           <a:p>
-            <a:pPr algn="r" indent="0" marL="0">
+            <a:pPr marL="0" indent="0" algn="r">
               <a:buNone/>
             </a:pPr>
             <a:r>
@@ -3839,11 +3717,11 @@
           <a:bodyPr wrap="square" lIns="0" tIns="0" rIns="0" bIns="0" rtlCol="0" anchor="ctr"/>
           <a:lstStyle/>
           <a:p>
-            <a:pPr indent="0" marL="0">
-              <a:buNone/>
-            </a:pPr>
-            <a:r>
-              <a:rPr lang="en-US" sz="1200" b="1" spc="200" kern="0" dirty="0">
+            <a:pPr marL="0" indent="0">
+              <a:buNone/>
+            </a:pPr>
+            <a:r>
+              <a:rPr lang="en-US" sz="1200" b="1" kern="0" spc="200" dirty="0">
                 <a:solidFill>
                   <a:srgbClr val="174D3B"/>
                 </a:solidFill>
@@ -3878,7 +3756,7 @@
           <a:bodyPr wrap="square" lIns="0" tIns="0" rIns="0" bIns="0" rtlCol="0" anchor="ctr"/>
           <a:lstStyle/>
           <a:p>
-            <a:pPr indent="0" marL="0">
+            <a:pPr marL="0" indent="0">
               <a:buNone/>
             </a:pPr>
             <a:r>
@@ -3917,7 +3795,7 @@
           <a:bodyPr wrap="square" lIns="0" tIns="0" rIns="0" bIns="0" rtlCol="0" anchor="ctr"/>
           <a:lstStyle/>
           <a:p>
-            <a:pPr indent="0" marL="0">
+            <a:pPr marL="0" indent="0">
               <a:buNone/>
             </a:pPr>
             <a:r>
@@ -3959,6 +3837,13 @@
             <a:prstDash val="solid"/>
           </a:ln>
         </p:spPr>
+        <p:txBody>
+          <a:bodyPr/>
+          <a:lstStyle/>
+          <a:p>
+            <a:endParaRPr lang="en-US"/>
+          </a:p>
+        </p:txBody>
       </p:sp>
       <p:sp>
         <p:nvSpPr>
@@ -3981,7 +3866,7 @@
           <a:bodyPr wrap="square" lIns="0" tIns="0" rIns="0" bIns="0" rtlCol="0" anchor="ctr"/>
           <a:lstStyle/>
           <a:p>
-            <a:pPr indent="0" marL="0">
+            <a:pPr marL="0" indent="0">
               <a:buNone/>
             </a:pPr>
             <a:r>
@@ -4020,7 +3905,7 @@
           <a:bodyPr wrap="square" lIns="0" tIns="0" rIns="0" bIns="0" rtlCol="0" anchor="ctr"/>
           <a:lstStyle/>
           <a:p>
-            <a:pPr indent="0" marL="0">
+            <a:pPr marL="0" indent="0">
               <a:buNone/>
             </a:pPr>
             <a:r>
@@ -4059,7 +3944,7 @@
           <a:bodyPr wrap="square" lIns="0" tIns="0" rIns="0" bIns="0" rtlCol="0" anchor="ctr"/>
           <a:lstStyle/>
           <a:p>
-            <a:pPr indent="0" marL="0">
+            <a:pPr marL="0" indent="0">
               <a:buNone/>
             </a:pPr>
             <a:r>
@@ -4076,7 +3961,7 @@
             <a:endParaRPr lang="en-US" sz="1400" dirty="0"/>
           </a:p>
           <a:p>
-            <a:pPr indent="0" marL="0">
+            <a:pPr marL="0" indent="0">
               <a:buNone/>
             </a:pPr>
             <a:r>
@@ -4118,6 +4003,13 @@
             <a:prstDash val="solid"/>
           </a:ln>
         </p:spPr>
+        <p:txBody>
+          <a:bodyPr/>
+          <a:lstStyle/>
+          <a:p>
+            <a:endParaRPr lang="en-US"/>
+          </a:p>
+        </p:txBody>
       </p:sp>
       <p:sp>
         <p:nvSpPr>
@@ -4140,7 +4032,7 @@
           <a:bodyPr wrap="square" lIns="0" tIns="0" rIns="0" bIns="0" rtlCol="0" anchor="ctr"/>
           <a:lstStyle/>
           <a:p>
-            <a:pPr indent="0" marL="0">
+            <a:pPr marL="0" indent="0">
               <a:buNone/>
             </a:pPr>
             <a:r>
@@ -4179,7 +4071,7 @@
           <a:bodyPr wrap="square" lIns="0" tIns="0" rIns="0" bIns="0" rtlCol="0" anchor="ctr"/>
           <a:lstStyle/>
           <a:p>
-            <a:pPr indent="0" marL="0">
+            <a:pPr marL="0" indent="0">
               <a:buNone/>
             </a:pPr>
             <a:r>
@@ -4218,7 +4110,7 @@
           <a:bodyPr wrap="square" lIns="0" tIns="0" rIns="0" bIns="0" rtlCol="0" anchor="ctr"/>
           <a:lstStyle/>
           <a:p>
-            <a:pPr indent="0" marL="0">
+            <a:pPr marL="0" indent="0">
               <a:buNone/>
             </a:pPr>
             <a:r>
@@ -4235,7 +4127,7 @@
             <a:endParaRPr lang="en-US" sz="1400" dirty="0"/>
           </a:p>
           <a:p>
-            <a:pPr indent="0" marL="0">
+            <a:pPr marL="0" indent="0">
               <a:buNone/>
             </a:pPr>
             <a:r>
@@ -4277,6 +4169,13 @@
             <a:prstDash val="solid"/>
           </a:ln>
         </p:spPr>
+        <p:txBody>
+          <a:bodyPr/>
+          <a:lstStyle/>
+          <a:p>
+            <a:endParaRPr lang="en-US"/>
+          </a:p>
+        </p:txBody>
       </p:sp>
       <p:sp>
         <p:nvSpPr>
@@ -4299,7 +4198,7 @@
           <a:bodyPr wrap="square" lIns="0" tIns="0" rIns="0" bIns="0" rtlCol="0" anchor="ctr"/>
           <a:lstStyle/>
           <a:p>
-            <a:pPr indent="0" marL="0">
+            <a:pPr marL="0" indent="0">
               <a:buNone/>
             </a:pPr>
             <a:r>
@@ -4338,7 +4237,7 @@
           <a:bodyPr wrap="square" lIns="0" tIns="0" rIns="0" bIns="0" rtlCol="0" anchor="ctr"/>
           <a:lstStyle/>
           <a:p>
-            <a:pPr indent="0" marL="0">
+            <a:pPr marL="0" indent="0">
               <a:buNone/>
             </a:pPr>
             <a:r>
@@ -4377,7 +4276,7 @@
           <a:bodyPr wrap="square" lIns="0" tIns="0" rIns="0" bIns="0" rtlCol="0" anchor="ctr"/>
           <a:lstStyle/>
           <a:p>
-            <a:pPr indent="0" marL="0">
+            <a:pPr marL="0" indent="0">
               <a:buNone/>
             </a:pPr>
             <a:r>
@@ -4394,7 +4293,7 @@
             <a:endParaRPr lang="en-US" sz="1400" dirty="0"/>
           </a:p>
           <a:p>
-            <a:pPr indent="0" marL="0">
+            <a:pPr marL="0" indent="0">
               <a:buNone/>
             </a:pPr>
             <a:r>
@@ -4436,6 +4335,13 @@
             <a:prstDash val="solid"/>
           </a:ln>
         </p:spPr>
+        <p:txBody>
+          <a:bodyPr/>
+          <a:lstStyle/>
+          <a:p>
+            <a:endParaRPr lang="en-US"/>
+          </a:p>
+        </p:txBody>
       </p:sp>
       <p:sp>
         <p:nvSpPr>
@@ -4458,7 +4364,7 @@
           <a:bodyPr wrap="square" lIns="0" tIns="0" rIns="0" bIns="0" rtlCol="0" anchor="ctr"/>
           <a:lstStyle/>
           <a:p>
-            <a:pPr indent="0" marL="0">
+            <a:pPr marL="0" indent="0">
               <a:buNone/>
             </a:pPr>
             <a:r>
@@ -4497,7 +4403,7 @@
           <a:bodyPr wrap="square" lIns="0" tIns="0" rIns="0" bIns="0" rtlCol="0" anchor="ctr"/>
           <a:lstStyle/>
           <a:p>
-            <a:pPr indent="0" marL="0">
+            <a:pPr marL="0" indent="0">
               <a:buNone/>
             </a:pPr>
             <a:r>
@@ -4536,7 +4442,7 @@
           <a:bodyPr wrap="square" lIns="0" tIns="0" rIns="0" bIns="0" rtlCol="0" anchor="ctr"/>
           <a:lstStyle/>
           <a:p>
-            <a:pPr indent="0" marL="0">
+            <a:pPr marL="0" indent="0">
               <a:buNone/>
             </a:pPr>
             <a:r>
@@ -4553,7 +4459,7 @@
             <a:endParaRPr lang="en-US" sz="1400" dirty="0"/>
           </a:p>
           <a:p>
-            <a:pPr indent="0" marL="0">
+            <a:pPr marL="0" indent="0">
               <a:buNone/>
             </a:pPr>
             <a:r>
@@ -4587,6 +4493,7 @@
         <a:solidFill>
           <a:srgbClr val="F5F7F2"/>
         </a:solidFill>
+        <a:effectLst/>
       </p:bgPr>
     </p:bg>
     <p:spTree>
@@ -4624,11 +4531,11 @@
           <a:bodyPr wrap="square" lIns="0" tIns="0" rIns="0" bIns="0" rtlCol="0" anchor="ctr"/>
           <a:lstStyle/>
           <a:p>
-            <a:pPr indent="0" marL="0">
-              <a:buNone/>
-            </a:pPr>
-            <a:r>
-              <a:rPr lang="en-US" sz="1200" b="1" spc="200" kern="0" dirty="0">
+            <a:pPr marL="0" indent="0">
+              <a:buNone/>
+            </a:pPr>
+            <a:r>
+              <a:rPr lang="en-US" sz="1200" b="1" kern="0" spc="200" dirty="0">
                 <a:solidFill>
                   <a:srgbClr val="174D3B"/>
                 </a:solidFill>
@@ -4663,11 +4570,11 @@
           <a:bodyPr wrap="square" lIns="0" tIns="0" rIns="0" bIns="0" rtlCol="0" anchor="ctr"/>
           <a:lstStyle/>
           <a:p>
-            <a:pPr algn="r" indent="0" marL="0">
-              <a:buNone/>
-            </a:pPr>
-            <a:r>
-              <a:rPr lang="en-US" sz="1000" spc="150" kern="0" dirty="0">
+            <a:pPr marL="0" indent="0" algn="r">
+              <a:buNone/>
+            </a:pPr>
+            <a:r>
+              <a:rPr lang="en-US" sz="1000" kern="0" spc="150" dirty="0">
                 <a:solidFill>
                   <a:srgbClr val="718478"/>
                 </a:solidFill>
@@ -4705,6 +4612,13 @@
             <a:prstDash val="solid"/>
           </a:ln>
         </p:spPr>
+        <p:txBody>
+          <a:bodyPr/>
+          <a:lstStyle/>
+          <a:p>
+            <a:endParaRPr lang="en-US"/>
+          </a:p>
+        </p:txBody>
       </p:sp>
       <p:sp>
         <p:nvSpPr>
@@ -4727,7 +4641,7 @@
           <a:bodyPr wrap="square" lIns="0" tIns="0" rIns="0" bIns="0" rtlCol="0" anchor="ctr"/>
           <a:lstStyle/>
           <a:p>
-            <a:pPr indent="0" marL="0">
+            <a:pPr marL="0" indent="0">
               <a:buNone/>
             </a:pPr>
             <a:r>
@@ -4766,7 +4680,7 @@
           <a:bodyPr wrap="square" lIns="0" tIns="0" rIns="0" bIns="0" rtlCol="0" anchor="ctr"/>
           <a:lstStyle/>
           <a:p>
-            <a:pPr algn="r" indent="0" marL="0">
+            <a:pPr marL="0" indent="0" algn="r">
               <a:buNone/>
             </a:pPr>
             <a:r>
@@ -4805,11 +4719,11 @@
           <a:bodyPr wrap="square" lIns="0" tIns="0" rIns="0" bIns="0" rtlCol="0" anchor="ctr"/>
           <a:lstStyle/>
           <a:p>
-            <a:pPr indent="0" marL="0">
-              <a:buNone/>
-            </a:pPr>
-            <a:r>
-              <a:rPr lang="en-US" sz="1200" b="1" spc="200" kern="0" dirty="0">
+            <a:pPr marL="0" indent="0">
+              <a:buNone/>
+            </a:pPr>
+            <a:r>
+              <a:rPr lang="en-US" sz="1200" b="1" kern="0" spc="200" dirty="0">
                 <a:solidFill>
                   <a:srgbClr val="174D3B"/>
                 </a:solidFill>
@@ -4844,7 +4758,7 @@
           <a:bodyPr wrap="square" lIns="0" tIns="0" rIns="0" bIns="0" rtlCol="0" anchor="ctr"/>
           <a:lstStyle/>
           <a:p>
-            <a:pPr indent="0" marL="0">
+            <a:pPr marL="0" indent="0">
               <a:buNone/>
             </a:pPr>
             <a:r>
@@ -4883,7 +4797,7 @@
           <a:bodyPr wrap="square" lIns="0" tIns="0" rIns="0" bIns="0" rtlCol="0" anchor="ctr"/>
           <a:lstStyle/>
           <a:p>
-            <a:pPr indent="0" marL="0">
+            <a:pPr marL="0" indent="0">
               <a:buNone/>
             </a:pPr>
             <a:r>
@@ -4925,6 +4839,13 @@
             <a:prstDash val="solid"/>
           </a:ln>
         </p:spPr>
+        <p:txBody>
+          <a:bodyPr/>
+          <a:lstStyle/>
+          <a:p>
+            <a:endParaRPr lang="en-US"/>
+          </a:p>
+        </p:txBody>
       </p:sp>
       <p:sp>
         <p:nvSpPr>
@@ -4950,6 +4871,13 @@
             <a:prstDash val="solid"/>
           </a:ln>
         </p:spPr>
+        <p:txBody>
+          <a:bodyPr/>
+          <a:lstStyle/>
+          <a:p>
+            <a:endParaRPr lang="en-US"/>
+          </a:p>
+        </p:txBody>
       </p:sp>
       <p:sp>
         <p:nvSpPr>
@@ -4975,6 +4903,13 @@
             <a:prstDash val="solid"/>
           </a:ln>
         </p:spPr>
+        <p:txBody>
+          <a:bodyPr/>
+          <a:lstStyle/>
+          <a:p>
+            <a:endParaRPr lang="en-US"/>
+          </a:p>
+        </p:txBody>
       </p:sp>
       <p:sp>
         <p:nvSpPr>
@@ -5000,6 +4935,13 @@
             <a:prstDash val="solid"/>
           </a:ln>
         </p:spPr>
+        <p:txBody>
+          <a:bodyPr/>
+          <a:lstStyle/>
+          <a:p>
+            <a:endParaRPr lang="en-US"/>
+          </a:p>
+        </p:txBody>
       </p:sp>
       <p:sp>
         <p:nvSpPr>
@@ -5023,6 +4965,13 @@
             <a:prstDash val="solid"/>
           </a:ln>
         </p:spPr>
+        <p:txBody>
+          <a:bodyPr/>
+          <a:lstStyle/>
+          <a:p>
+            <a:endParaRPr lang="en-US"/>
+          </a:p>
+        </p:txBody>
       </p:sp>
       <p:sp>
         <p:nvSpPr>
@@ -5046,6 +4995,13 @@
             <a:prstDash val="solid"/>
           </a:ln>
         </p:spPr>
+        <p:txBody>
+          <a:bodyPr/>
+          <a:lstStyle/>
+          <a:p>
+            <a:endParaRPr lang="en-US"/>
+          </a:p>
+        </p:txBody>
       </p:sp>
       <p:sp>
         <p:nvSpPr>
@@ -5069,6 +5025,13 @@
             <a:prstDash val="dash"/>
           </a:ln>
         </p:spPr>
+        <p:txBody>
+          <a:bodyPr/>
+          <a:lstStyle/>
+          <a:p>
+            <a:endParaRPr lang="en-US"/>
+          </a:p>
+        </p:txBody>
       </p:sp>
       <p:sp>
         <p:nvSpPr>
@@ -5091,7 +5054,7 @@
           <a:bodyPr wrap="square" lIns="0" tIns="0" rIns="0" bIns="0" rtlCol="0" anchor="ctr"/>
           <a:lstStyle/>
           <a:p>
-            <a:pPr indent="0" marL="0">
+            <a:pPr marL="0" indent="0">
               <a:buNone/>
             </a:pPr>
             <a:r>
@@ -5130,7 +5093,7 @@
           <a:bodyPr wrap="square" lIns="0" tIns="0" rIns="0" bIns="0" rtlCol="0" anchor="ctr"/>
           <a:lstStyle/>
           <a:p>
-            <a:pPr indent="0" marL="0">
+            <a:pPr marL="0" indent="0">
               <a:buNone/>
             </a:pPr>
             <a:r>
@@ -5169,7 +5132,7 @@
           <a:bodyPr wrap="square" lIns="0" tIns="0" rIns="0" bIns="0" rtlCol="0" anchor="ctr"/>
           <a:lstStyle/>
           <a:p>
-            <a:pPr indent="0" marL="0">
+            <a:pPr marL="0" indent="0">
               <a:buNone/>
             </a:pPr>
             <a:r>
@@ -5186,7 +5149,7 @@
             <a:endParaRPr lang="en-US" sz="1500" dirty="0"/>
           </a:p>
           <a:p>
-            <a:pPr indent="0" marL="0">
+            <a:pPr marL="0" indent="0">
               <a:buNone/>
             </a:pPr>
             <a:r>
@@ -5228,6 +5191,13 @@
             <a:prstDash val="solid"/>
           </a:ln>
         </p:spPr>
+        <p:txBody>
+          <a:bodyPr/>
+          <a:lstStyle/>
+          <a:p>
+            <a:endParaRPr lang="en-US"/>
+          </a:p>
+        </p:txBody>
       </p:sp>
       <p:sp>
         <p:nvSpPr>
@@ -5237,7 +5207,7 @@
         </p:nvSpPr>
         <p:spPr>
           <a:xfrm>
-            <a:off x="5093208" y="5486400"/>
+            <a:off x="5074920" y="5522976"/>
             <a:ext cx="1737360" cy="137160"/>
           </a:xfrm>
           <a:prstGeom prst="rect">
@@ -5250,7 +5220,7 @@
           <a:bodyPr wrap="square" lIns="0" tIns="0" rIns="0" bIns="0" rtlCol="0" anchor="ctr"/>
           <a:lstStyle/>
           <a:p>
-            <a:pPr indent="0" marL="0">
+            <a:pPr marL="0" indent="0">
               <a:buNone/>
             </a:pPr>
             <a:r>
@@ -5289,7 +5259,7 @@
           <a:bodyPr wrap="square" lIns="0" tIns="0" rIns="0" bIns="0" rtlCol="0" anchor="ctr"/>
           <a:lstStyle/>
           <a:p>
-            <a:pPr indent="0" marL="0">
+            <a:pPr marL="0" indent="0">
               <a:buNone/>
             </a:pPr>
             <a:r>
@@ -5328,7 +5298,7 @@
           <a:bodyPr wrap="square" lIns="0" tIns="0" rIns="0" bIns="0" rtlCol="0" anchor="ctr"/>
           <a:lstStyle/>
           <a:p>
-            <a:pPr indent="0" marL="0">
+            <a:pPr marL="0" indent="0">
               <a:buNone/>
             </a:pPr>
             <a:r>
@@ -5345,13 +5315,13 @@
             <a:endParaRPr lang="en-US" sz="1700" dirty="0"/>
           </a:p>
           <a:p>
-            <a:pPr indent="0" marL="0">
+            <a:pPr marL="0" indent="0">
               <a:buNone/>
             </a:pPr>
             <a:endParaRPr lang="en-US" sz="1700" dirty="0"/>
           </a:p>
           <a:p>
-            <a:pPr indent="0" marL="0">
+            <a:pPr marL="0" indent="0">
               <a:buNone/>
             </a:pPr>
             <a:r>
@@ -5368,13 +5338,13 @@
             <a:endParaRPr lang="en-US" sz="1700" dirty="0"/>
           </a:p>
           <a:p>
-            <a:pPr indent="0" marL="0">
+            <a:pPr marL="0" indent="0">
               <a:buNone/>
             </a:pPr>
             <a:endParaRPr lang="en-US" sz="1700" dirty="0"/>
           </a:p>
           <a:p>
-            <a:pPr indent="0" marL="0">
+            <a:pPr marL="0" indent="0">
               <a:buNone/>
             </a:pPr>
             <a:r>
@@ -5391,13 +5361,13 @@
             <a:endParaRPr lang="en-US" sz="1700" dirty="0"/>
           </a:p>
           <a:p>
-            <a:pPr indent="0" marL="0">
+            <a:pPr marL="0" indent="0">
               <a:buNone/>
             </a:pPr>
             <a:endParaRPr lang="en-US" sz="1700" dirty="0"/>
           </a:p>
           <a:p>
-            <a:pPr indent="0" marL="0">
+            <a:pPr marL="0" indent="0">
               <a:buNone/>
             </a:pPr>
             <a:r>
@@ -5431,6 +5401,7 @@
         <a:solidFill>
           <a:srgbClr val="F5F7F2"/>
         </a:solidFill>
+        <a:effectLst/>
       </p:bgPr>
     </p:bg>
     <p:spTree>
@@ -5468,11 +5439,11 @@
           <a:bodyPr wrap="square" lIns="0" tIns="0" rIns="0" bIns="0" rtlCol="0" anchor="ctr"/>
           <a:lstStyle/>
           <a:p>
-            <a:pPr indent="0" marL="0">
-              <a:buNone/>
-            </a:pPr>
-            <a:r>
-              <a:rPr lang="en-US" sz="1200" b="1" spc="200" kern="0" dirty="0">
+            <a:pPr marL="0" indent="0">
+              <a:buNone/>
+            </a:pPr>
+            <a:r>
+              <a:rPr lang="en-US" sz="1200" b="1" kern="0" spc="200" dirty="0">
                 <a:solidFill>
                   <a:srgbClr val="174D3B"/>
                 </a:solidFill>
@@ -5507,11 +5478,11 @@
           <a:bodyPr wrap="square" lIns="0" tIns="0" rIns="0" bIns="0" rtlCol="0" anchor="ctr"/>
           <a:lstStyle/>
           <a:p>
-            <a:pPr algn="r" indent="0" marL="0">
-              <a:buNone/>
-            </a:pPr>
-            <a:r>
-              <a:rPr lang="en-US" sz="1000" spc="150" kern="0" dirty="0">
+            <a:pPr marL="0" indent="0" algn="r">
+              <a:buNone/>
+            </a:pPr>
+            <a:r>
+              <a:rPr lang="en-US" sz="1000" kern="0" spc="150" dirty="0">
                 <a:solidFill>
                   <a:srgbClr val="718478"/>
                 </a:solidFill>
@@ -5549,6 +5520,13 @@
             <a:prstDash val="solid"/>
           </a:ln>
         </p:spPr>
+        <p:txBody>
+          <a:bodyPr/>
+          <a:lstStyle/>
+          <a:p>
+            <a:endParaRPr lang="en-US"/>
+          </a:p>
+        </p:txBody>
       </p:sp>
       <p:sp>
         <p:nvSpPr>
@@ -5571,7 +5549,7 @@
           <a:bodyPr wrap="square" lIns="0" tIns="0" rIns="0" bIns="0" rtlCol="0" anchor="ctr"/>
           <a:lstStyle/>
           <a:p>
-            <a:pPr indent="0" marL="0">
+            <a:pPr marL="0" indent="0">
               <a:buNone/>
             </a:pPr>
             <a:r>
@@ -5610,7 +5588,7 @@
           <a:bodyPr wrap="square" lIns="0" tIns="0" rIns="0" bIns="0" rtlCol="0" anchor="ctr"/>
           <a:lstStyle/>
           <a:p>
-            <a:pPr algn="r" indent="0" marL="0">
+            <a:pPr marL="0" indent="0" algn="r">
               <a:buNone/>
             </a:pPr>
             <a:r>
@@ -5649,11 +5627,11 @@
           <a:bodyPr wrap="square" lIns="0" tIns="0" rIns="0" bIns="0" rtlCol="0" anchor="ctr"/>
           <a:lstStyle/>
           <a:p>
-            <a:pPr indent="0" marL="0">
-              <a:buNone/>
-            </a:pPr>
-            <a:r>
-              <a:rPr lang="en-US" sz="1200" b="1" spc="200" kern="0" dirty="0">
+            <a:pPr marL="0" indent="0">
+              <a:buNone/>
+            </a:pPr>
+            <a:r>
+              <a:rPr lang="en-US" sz="1200" b="1" kern="0" spc="200" dirty="0">
                 <a:solidFill>
                   <a:srgbClr val="174D3B"/>
                 </a:solidFill>
@@ -5688,7 +5666,7 @@
           <a:bodyPr wrap="square" lIns="0" tIns="0" rIns="0" bIns="0" rtlCol="0" anchor="ctr"/>
           <a:lstStyle/>
           <a:p>
-            <a:pPr indent="0" marL="0">
+            <a:pPr marL="0" indent="0">
               <a:buNone/>
             </a:pPr>
             <a:r>
@@ -5727,7 +5705,7 @@
           <a:bodyPr wrap="square" lIns="0" tIns="0" rIns="0" bIns="0" rtlCol="0" anchor="ctr"/>
           <a:lstStyle/>
           <a:p>
-            <a:pPr indent="0" marL="0">
+            <a:pPr marL="0" indent="0">
               <a:buNone/>
             </a:pPr>
             <a:r>
@@ -5769,6 +5747,13 @@
             <a:prstDash val="solid"/>
           </a:ln>
         </p:spPr>
+        <p:txBody>
+          <a:bodyPr/>
+          <a:lstStyle/>
+          <a:p>
+            <a:endParaRPr lang="en-US"/>
+          </a:p>
+        </p:txBody>
       </p:sp>
       <p:sp>
         <p:nvSpPr>
@@ -5794,6 +5779,13 @@
             <a:prstDash val="solid"/>
           </a:ln>
         </p:spPr>
+        <p:txBody>
+          <a:bodyPr/>
+          <a:lstStyle/>
+          <a:p>
+            <a:endParaRPr lang="en-US"/>
+          </a:p>
+        </p:txBody>
       </p:sp>
       <p:sp>
         <p:nvSpPr>
@@ -5819,6 +5811,13 @@
             <a:prstDash val="solid"/>
           </a:ln>
         </p:spPr>
+        <p:txBody>
+          <a:bodyPr/>
+          <a:lstStyle/>
+          <a:p>
+            <a:endParaRPr lang="en-US"/>
+          </a:p>
+        </p:txBody>
       </p:sp>
       <p:sp>
         <p:nvSpPr>
@@ -5842,6 +5841,13 @@
             <a:prstDash val="solid"/>
           </a:ln>
         </p:spPr>
+        <p:txBody>
+          <a:bodyPr/>
+          <a:lstStyle/>
+          <a:p>
+            <a:endParaRPr lang="en-US"/>
+          </a:p>
+        </p:txBody>
       </p:sp>
       <p:sp>
         <p:nvSpPr>
@@ -5865,6 +5871,13 @@
             <a:prstDash val="solid"/>
           </a:ln>
         </p:spPr>
+        <p:txBody>
+          <a:bodyPr/>
+          <a:lstStyle/>
+          <a:p>
+            <a:endParaRPr lang="en-US"/>
+          </a:p>
+        </p:txBody>
       </p:sp>
       <p:sp>
         <p:nvSpPr>
@@ -5888,6 +5901,13 @@
             <a:prstDash val="dash"/>
           </a:ln>
         </p:spPr>
+        <p:txBody>
+          <a:bodyPr/>
+          <a:lstStyle/>
+          <a:p>
+            <a:endParaRPr lang="en-US"/>
+          </a:p>
+        </p:txBody>
       </p:sp>
       <p:sp>
         <p:nvSpPr>
@@ -5910,7 +5930,7 @@
           <a:bodyPr wrap="square" lIns="0" tIns="0" rIns="0" bIns="0" rtlCol="0" anchor="ctr"/>
           <a:lstStyle/>
           <a:p>
-            <a:pPr algn="ctr" indent="0" marL="0">
+            <a:pPr marL="0" indent="0" algn="ctr">
               <a:buNone/>
             </a:pPr>
             <a:r>
@@ -5949,7 +5969,7 @@
           <a:bodyPr wrap="square" lIns="0" tIns="0" rIns="0" bIns="0" rtlCol="0" anchor="ctr"/>
           <a:lstStyle/>
           <a:p>
-            <a:pPr indent="0" marL="0">
+            <a:pPr marL="0" indent="0">
               <a:buNone/>
             </a:pPr>
             <a:r>
@@ -5988,7 +6008,7 @@
           <a:bodyPr wrap="square" lIns="0" tIns="0" rIns="0" bIns="0" rtlCol="0" anchor="ctr"/>
           <a:lstStyle/>
           <a:p>
-            <a:pPr indent="0" marL="0">
+            <a:pPr marL="0" indent="0">
               <a:buNone/>
             </a:pPr>
             <a:r>
@@ -6005,13 +6025,13 @@
             <a:endParaRPr lang="en-US" sz="1700" dirty="0"/>
           </a:p>
           <a:p>
-            <a:pPr indent="0" marL="0">
+            <a:pPr marL="0" indent="0">
               <a:buNone/>
             </a:pPr>
             <a:endParaRPr lang="en-US" sz="1700" dirty="0"/>
           </a:p>
           <a:p>
-            <a:pPr indent="0" marL="0">
+            <a:pPr marL="0" indent="0">
               <a:buNone/>
             </a:pPr>
             <a:r>
@@ -6028,13 +6048,13 @@
             <a:endParaRPr lang="en-US" sz="1700" dirty="0"/>
           </a:p>
           <a:p>
-            <a:pPr indent="0" marL="0">
+            <a:pPr marL="0" indent="0">
               <a:buNone/>
             </a:pPr>
             <a:endParaRPr lang="en-US" sz="1700" dirty="0"/>
           </a:p>
           <a:p>
-            <a:pPr indent="0" marL="0">
+            <a:pPr marL="0" indent="0">
               <a:buNone/>
             </a:pPr>
             <a:r>
@@ -6073,7 +6093,7 @@
           <a:bodyPr wrap="square" lIns="0" tIns="0" rIns="0" bIns="0" rtlCol="0" anchor="ctr"/>
           <a:lstStyle/>
           <a:p>
-            <a:pPr indent="0" marL="0">
+            <a:pPr marL="0" indent="0">
               <a:buNone/>
             </a:pPr>
             <a:r>
@@ -6112,7 +6132,7 @@
           <a:bodyPr wrap="square" lIns="0" tIns="0" rIns="0" bIns="0" rtlCol="0" anchor="ctr"/>
           <a:lstStyle/>
           <a:p>
-            <a:pPr indent="0" marL="0">
+            <a:pPr marL="0" indent="0">
               <a:buNone/>
             </a:pPr>
             <a:r>
@@ -6129,13 +6149,13 @@
             <a:endParaRPr lang="en-US" sz="1700" dirty="0"/>
           </a:p>
           <a:p>
-            <a:pPr indent="0" marL="0">
+            <a:pPr marL="0" indent="0">
               <a:buNone/>
             </a:pPr>
             <a:endParaRPr lang="en-US" sz="1700" dirty="0"/>
           </a:p>
           <a:p>
-            <a:pPr indent="0" marL="0">
+            <a:pPr marL="0" indent="0">
               <a:buNone/>
             </a:pPr>
             <a:r>
@@ -6152,13 +6172,13 @@
             <a:endParaRPr lang="en-US" sz="1700" dirty="0"/>
           </a:p>
           <a:p>
-            <a:pPr indent="0" marL="0">
+            <a:pPr marL="0" indent="0">
               <a:buNone/>
             </a:pPr>
             <a:endParaRPr lang="en-US" sz="1700" dirty="0"/>
           </a:p>
           <a:p>
-            <a:pPr indent="0" marL="0">
+            <a:pPr marL="0" indent="0">
               <a:buNone/>
             </a:pPr>
             <a:r>
@@ -6192,6 +6212,7 @@
         <a:solidFill>
           <a:srgbClr val="F5F7F2"/>
         </a:solidFill>
+        <a:effectLst/>
       </p:bgPr>
     </p:bg>
     <p:spTree>
@@ -6229,11 +6250,11 @@
           <a:bodyPr wrap="square" lIns="0" tIns="0" rIns="0" bIns="0" rtlCol="0" anchor="ctr"/>
           <a:lstStyle/>
           <a:p>
-            <a:pPr indent="0" marL="0">
-              <a:buNone/>
-            </a:pPr>
-            <a:r>
-              <a:rPr lang="en-US" sz="1200" b="1" spc="200" kern="0" dirty="0">
+            <a:pPr marL="0" indent="0">
+              <a:buNone/>
+            </a:pPr>
+            <a:r>
+              <a:rPr lang="en-US" sz="1200" b="1" kern="0" spc="200" dirty="0">
                 <a:solidFill>
                   <a:srgbClr val="174D3B"/>
                 </a:solidFill>
@@ -6268,11 +6289,11 @@
           <a:bodyPr wrap="square" lIns="0" tIns="0" rIns="0" bIns="0" rtlCol="0" anchor="ctr"/>
           <a:lstStyle/>
           <a:p>
-            <a:pPr algn="r" indent="0" marL="0">
-              <a:buNone/>
-            </a:pPr>
-            <a:r>
-              <a:rPr lang="en-US" sz="1000" spc="150" kern="0" dirty="0">
+            <a:pPr marL="0" indent="0" algn="r">
+              <a:buNone/>
+            </a:pPr>
+            <a:r>
+              <a:rPr lang="en-US" sz="1000" kern="0" spc="150" dirty="0">
                 <a:solidFill>
                   <a:srgbClr val="718478"/>
                 </a:solidFill>
@@ -6310,6 +6331,13 @@
             <a:prstDash val="solid"/>
           </a:ln>
         </p:spPr>
+        <p:txBody>
+          <a:bodyPr/>
+          <a:lstStyle/>
+          <a:p>
+            <a:endParaRPr lang="en-US"/>
+          </a:p>
+        </p:txBody>
       </p:sp>
       <p:sp>
         <p:nvSpPr>
@@ -6332,7 +6360,7 @@
           <a:bodyPr wrap="square" lIns="0" tIns="0" rIns="0" bIns="0" rtlCol="0" anchor="ctr"/>
           <a:lstStyle/>
           <a:p>
-            <a:pPr indent="0" marL="0">
+            <a:pPr marL="0" indent="0">
               <a:buNone/>
             </a:pPr>
             <a:r>
@@ -6371,7 +6399,7 @@
           <a:bodyPr wrap="square" lIns="0" tIns="0" rIns="0" bIns="0" rtlCol="0" anchor="ctr"/>
           <a:lstStyle/>
           <a:p>
-            <a:pPr algn="r" indent="0" marL="0">
+            <a:pPr marL="0" indent="0" algn="r">
               <a:buNone/>
             </a:pPr>
             <a:r>
@@ -6410,11 +6438,11 @@
           <a:bodyPr wrap="square" lIns="0" tIns="0" rIns="0" bIns="0" rtlCol="0" anchor="ctr"/>
           <a:lstStyle/>
           <a:p>
-            <a:pPr indent="0" marL="0">
-              <a:buNone/>
-            </a:pPr>
-            <a:r>
-              <a:rPr lang="en-US" sz="1200" b="1" spc="200" kern="0" dirty="0">
+            <a:pPr marL="0" indent="0">
+              <a:buNone/>
+            </a:pPr>
+            <a:r>
+              <a:rPr lang="en-US" sz="1200" b="1" kern="0" spc="200" dirty="0">
                 <a:solidFill>
                   <a:srgbClr val="174D3B"/>
                 </a:solidFill>
@@ -6449,7 +6477,7 @@
           <a:bodyPr wrap="square" lIns="0" tIns="0" rIns="0" bIns="0" rtlCol="0" anchor="ctr"/>
           <a:lstStyle/>
           <a:p>
-            <a:pPr indent="0" marL="0">
+            <a:pPr marL="0" indent="0">
               <a:buNone/>
             </a:pPr>
             <a:r>
@@ -6488,7 +6516,7 @@
           <a:bodyPr wrap="square" lIns="0" tIns="0" rIns="0" bIns="0" rtlCol="0" anchor="ctr"/>
           <a:lstStyle/>
           <a:p>
-            <a:pPr indent="0" marL="0">
+            <a:pPr marL="0" indent="0">
               <a:buNone/>
             </a:pPr>
             <a:r>
@@ -6530,6 +6558,13 @@
             <a:prstDash val="solid"/>
           </a:ln>
         </p:spPr>
+        <p:txBody>
+          <a:bodyPr/>
+          <a:lstStyle/>
+          <a:p>
+            <a:endParaRPr lang="en-US"/>
+          </a:p>
+        </p:txBody>
       </p:sp>
       <p:sp>
         <p:nvSpPr>
@@ -6552,11 +6587,11 @@
           <a:bodyPr wrap="square" lIns="0" tIns="0" rIns="0" bIns="0" rtlCol="0" anchor="ctr"/>
           <a:lstStyle/>
           <a:p>
-            <a:pPr indent="0" marL="0">
-              <a:buNone/>
-            </a:pPr>
-            <a:r>
-              <a:rPr lang="en-US" sz="1100" b="1" spc="100" kern="0" dirty="0">
+            <a:pPr marL="0" indent="0">
+              <a:buNone/>
+            </a:pPr>
+            <a:r>
+              <a:rPr lang="en-US" sz="1100" b="1" kern="0" spc="100" dirty="0">
                 <a:solidFill>
                   <a:srgbClr val="174D3B"/>
                 </a:solidFill>
@@ -6591,7 +6626,7 @@
           <a:bodyPr wrap="square" lIns="0" tIns="0" rIns="0" bIns="0" rtlCol="0" anchor="ctr"/>
           <a:lstStyle/>
           <a:p>
-            <a:pPr indent="0" marL="0">
+            <a:pPr marL="0" indent="0">
               <a:buNone/>
             </a:pPr>
             <a:r>
@@ -6630,7 +6665,7 @@
           <a:bodyPr wrap="square" lIns="0" tIns="0" rIns="0" bIns="0" rtlCol="0" anchor="ctr"/>
           <a:lstStyle/>
           <a:p>
-            <a:pPr indent="0" marL="0">
+            <a:pPr marL="0" indent="0">
               <a:buNone/>
             </a:pPr>
             <a:r>
@@ -6672,6 +6707,13 @@
             <a:prstDash val="solid"/>
           </a:ln>
         </p:spPr>
+        <p:txBody>
+          <a:bodyPr/>
+          <a:lstStyle/>
+          <a:p>
+            <a:endParaRPr lang="en-US"/>
+          </a:p>
+        </p:txBody>
       </p:sp>
       <p:sp>
         <p:nvSpPr>
@@ -6694,11 +6736,11 @@
           <a:bodyPr wrap="square" lIns="0" tIns="0" rIns="0" bIns="0" rtlCol="0" anchor="ctr"/>
           <a:lstStyle/>
           <a:p>
-            <a:pPr indent="0" marL="0">
-              <a:buNone/>
-            </a:pPr>
-            <a:r>
-              <a:rPr lang="en-US" sz="1100" b="1" spc="100" kern="0" dirty="0">
+            <a:pPr marL="0" indent="0">
+              <a:buNone/>
+            </a:pPr>
+            <a:r>
+              <a:rPr lang="en-US" sz="1100" b="1" kern="0" spc="100" dirty="0">
                 <a:solidFill>
                   <a:srgbClr val="174D3B"/>
                 </a:solidFill>
@@ -6733,7 +6775,7 @@
           <a:bodyPr wrap="square" lIns="0" tIns="0" rIns="0" bIns="0" rtlCol="0" anchor="ctr"/>
           <a:lstStyle/>
           <a:p>
-            <a:pPr indent="0" marL="0">
+            <a:pPr marL="0" indent="0">
               <a:buNone/>
             </a:pPr>
             <a:r>
@@ -6772,7 +6814,7 @@
           <a:bodyPr wrap="square" lIns="0" tIns="0" rIns="0" bIns="0" rtlCol="0" anchor="ctr"/>
           <a:lstStyle/>
           <a:p>
-            <a:pPr indent="0" marL="0">
+            <a:pPr marL="0" indent="0">
               <a:buNone/>
             </a:pPr>
             <a:r>
@@ -6814,6 +6856,13 @@
             <a:prstDash val="solid"/>
           </a:ln>
         </p:spPr>
+        <p:txBody>
+          <a:bodyPr/>
+          <a:lstStyle/>
+          <a:p>
+            <a:endParaRPr lang="en-US"/>
+          </a:p>
+        </p:txBody>
       </p:sp>
       <p:sp>
         <p:nvSpPr>
@@ -6836,11 +6885,11 @@
           <a:bodyPr wrap="square" lIns="0" tIns="0" rIns="0" bIns="0" rtlCol="0" anchor="ctr"/>
           <a:lstStyle/>
           <a:p>
-            <a:pPr indent="0" marL="0">
-              <a:buNone/>
-            </a:pPr>
-            <a:r>
-              <a:rPr lang="en-US" sz="1100" b="1" spc="100" kern="0" dirty="0">
+            <a:pPr marL="0" indent="0">
+              <a:buNone/>
+            </a:pPr>
+            <a:r>
+              <a:rPr lang="en-US" sz="1100" b="1" kern="0" spc="100" dirty="0">
                 <a:solidFill>
                   <a:srgbClr val="174D3B"/>
                 </a:solidFill>
@@ -6875,7 +6924,7 @@
           <a:bodyPr wrap="square" lIns="0" tIns="0" rIns="0" bIns="0" rtlCol="0" anchor="ctr"/>
           <a:lstStyle/>
           <a:p>
-            <a:pPr indent="0" marL="0">
+            <a:pPr marL="0" indent="0">
               <a:buNone/>
             </a:pPr>
             <a:r>
@@ -6914,7 +6963,7 @@
           <a:bodyPr wrap="square" lIns="0" tIns="0" rIns="0" bIns="0" rtlCol="0" anchor="ctr"/>
           <a:lstStyle/>
           <a:p>
-            <a:pPr indent="0" marL="0">
+            <a:pPr marL="0" indent="0">
               <a:buNone/>
             </a:pPr>
             <a:r>
@@ -6948,6 +6997,7 @@
         <a:solidFill>
           <a:srgbClr val="F5F7F2"/>
         </a:solidFill>
+        <a:effectLst/>
       </p:bgPr>
     </p:bg>
     <p:spTree>
@@ -6985,11 +7035,11 @@
           <a:bodyPr wrap="square" lIns="0" tIns="0" rIns="0" bIns="0" rtlCol="0" anchor="ctr"/>
           <a:lstStyle/>
           <a:p>
-            <a:pPr indent="0" marL="0">
-              <a:buNone/>
-            </a:pPr>
-            <a:r>
-              <a:rPr lang="en-US" sz="1200" b="1" spc="200" kern="0" dirty="0">
+            <a:pPr marL="0" indent="0">
+              <a:buNone/>
+            </a:pPr>
+            <a:r>
+              <a:rPr lang="en-US" sz="1200" b="1" kern="0" spc="200" dirty="0">
                 <a:solidFill>
                   <a:srgbClr val="174D3B"/>
                 </a:solidFill>
@@ -7024,11 +7074,11 @@
           <a:bodyPr wrap="square" lIns="0" tIns="0" rIns="0" bIns="0" rtlCol="0" anchor="ctr"/>
           <a:lstStyle/>
           <a:p>
-            <a:pPr algn="r" indent="0" marL="0">
-              <a:buNone/>
-            </a:pPr>
-            <a:r>
-              <a:rPr lang="en-US" sz="1000" spc="150" kern="0" dirty="0">
+            <a:pPr marL="0" indent="0" algn="r">
+              <a:buNone/>
+            </a:pPr>
+            <a:r>
+              <a:rPr lang="en-US" sz="1000" kern="0" spc="150" dirty="0">
                 <a:solidFill>
                   <a:srgbClr val="718478"/>
                 </a:solidFill>
@@ -7066,6 +7116,13 @@
             <a:prstDash val="solid"/>
           </a:ln>
         </p:spPr>
+        <p:txBody>
+          <a:bodyPr/>
+          <a:lstStyle/>
+          <a:p>
+            <a:endParaRPr lang="en-US"/>
+          </a:p>
+        </p:txBody>
       </p:sp>
       <p:sp>
         <p:nvSpPr>
@@ -7088,7 +7145,7 @@
           <a:bodyPr wrap="square" lIns="0" tIns="0" rIns="0" bIns="0" rtlCol="0" anchor="ctr"/>
           <a:lstStyle/>
           <a:p>
-            <a:pPr indent="0" marL="0">
+            <a:pPr marL="0" indent="0">
               <a:buNone/>
             </a:pPr>
             <a:r>
@@ -7127,7 +7184,7 @@
           <a:bodyPr wrap="square" lIns="0" tIns="0" rIns="0" bIns="0" rtlCol="0" anchor="ctr"/>
           <a:lstStyle/>
           <a:p>
-            <a:pPr algn="r" indent="0" marL="0">
+            <a:pPr marL="0" indent="0" algn="r">
               <a:buNone/>
             </a:pPr>
             <a:r>
@@ -7166,11 +7223,11 @@
           <a:bodyPr wrap="square" lIns="0" tIns="0" rIns="0" bIns="0" rtlCol="0" anchor="ctr"/>
           <a:lstStyle/>
           <a:p>
-            <a:pPr indent="0" marL="0">
-              <a:buNone/>
-            </a:pPr>
-            <a:r>
-              <a:rPr lang="en-US" sz="1200" b="1" spc="200" kern="0" dirty="0">
+            <a:pPr marL="0" indent="0">
+              <a:buNone/>
+            </a:pPr>
+            <a:r>
+              <a:rPr lang="en-US" sz="1200" b="1" kern="0" spc="200" dirty="0">
                 <a:solidFill>
                   <a:srgbClr val="174D3B"/>
                 </a:solidFill>
@@ -7205,7 +7262,7 @@
           <a:bodyPr wrap="square" lIns="0" tIns="0" rIns="0" bIns="0" rtlCol="0" anchor="ctr"/>
           <a:lstStyle/>
           <a:p>
-            <a:pPr indent="0" marL="0">
+            <a:pPr marL="0" indent="0">
               <a:buNone/>
             </a:pPr>
             <a:r>
@@ -7244,7 +7301,7 @@
           <a:bodyPr wrap="square" lIns="0" tIns="0" rIns="0" bIns="0" rtlCol="0" anchor="ctr"/>
           <a:lstStyle/>
           <a:p>
-            <a:pPr indent="0" marL="0">
+            <a:pPr marL="0" indent="0">
               <a:buNone/>
             </a:pPr>
             <a:r>
@@ -7286,6 +7343,13 @@
             <a:prstDash val="solid"/>
           </a:ln>
         </p:spPr>
+        <p:txBody>
+          <a:bodyPr/>
+          <a:lstStyle/>
+          <a:p>
+            <a:endParaRPr lang="en-US"/>
+          </a:p>
+        </p:txBody>
       </p:sp>
       <p:sp>
         <p:nvSpPr>
@@ -7311,6 +7375,13 @@
             <a:prstDash val="solid"/>
           </a:ln>
         </p:spPr>
+        <p:txBody>
+          <a:bodyPr/>
+          <a:lstStyle/>
+          <a:p>
+            <a:endParaRPr lang="en-US"/>
+          </a:p>
+        </p:txBody>
       </p:sp>
       <p:sp>
         <p:nvSpPr>
@@ -7333,7 +7404,7 @@
           <a:bodyPr wrap="square" lIns="0" tIns="0" rIns="0" bIns="0" rtlCol="0" anchor="ctr"/>
           <a:lstStyle/>
           <a:p>
-            <a:pPr indent="0" marL="0">
+            <a:pPr marL="0" indent="0">
               <a:buNone/>
             </a:pPr>
             <a:r>
@@ -7372,7 +7443,7 @@
           <a:bodyPr wrap="square" lIns="0" tIns="0" rIns="0" bIns="0" rtlCol="0" anchor="ctr"/>
           <a:lstStyle/>
           <a:p>
-            <a:pPr indent="0" marL="0">
+            <a:pPr marL="0" indent="0">
               <a:buNone/>
             </a:pPr>
             <a:r>
@@ -7389,7 +7460,7 @@
             <a:endParaRPr lang="en-US" sz="1800" dirty="0"/>
           </a:p>
           <a:p>
-            <a:pPr indent="0" marL="0">
+            <a:pPr marL="0" indent="0">
               <a:buNone/>
             </a:pPr>
             <a:r>
@@ -7406,7 +7477,7 @@
             <a:endParaRPr lang="en-US" sz="1800" dirty="0"/>
           </a:p>
           <a:p>
-            <a:pPr indent="0" marL="0">
+            <a:pPr marL="0" indent="0">
               <a:buNone/>
             </a:pPr>
             <a:r>
@@ -7423,7 +7494,7 @@
             <a:endParaRPr lang="en-US" sz="1800" dirty="0"/>
           </a:p>
           <a:p>
-            <a:pPr indent="0" marL="0">
+            <a:pPr marL="0" indent="0">
               <a:buNone/>
             </a:pPr>
             <a:r>
@@ -7440,7 +7511,7 @@
             <a:endParaRPr lang="en-US" sz="1800" dirty="0"/>
           </a:p>
           <a:p>
-            <a:pPr indent="0" marL="0">
+            <a:pPr marL="0" indent="0">
               <a:buNone/>
             </a:pPr>
             <a:r>
@@ -7479,7 +7550,7 @@
           <a:bodyPr wrap="square" lIns="0" tIns="0" rIns="0" bIns="0" rtlCol="0" anchor="ctr"/>
           <a:lstStyle/>
           <a:p>
-            <a:pPr indent="0" marL="0">
+            <a:pPr marL="0" indent="0">
               <a:buNone/>
             </a:pPr>
             <a:r>
@@ -7518,7 +7589,7 @@
           <a:bodyPr wrap="square" lIns="0" tIns="0" rIns="0" bIns="0" rtlCol="0" anchor="ctr"/>
           <a:lstStyle/>
           <a:p>
-            <a:pPr indent="0" marL="0">
+            <a:pPr marL="0" indent="0">
               <a:buNone/>
             </a:pPr>
             <a:r>
@@ -7535,7 +7606,7 @@
             <a:endParaRPr lang="en-US" sz="1800" dirty="0"/>
           </a:p>
           <a:p>
-            <a:pPr indent="0" marL="0">
+            <a:pPr marL="0" indent="0">
               <a:buNone/>
             </a:pPr>
             <a:r>
@@ -7552,7 +7623,7 @@
             <a:endParaRPr lang="en-US" sz="1800" dirty="0"/>
           </a:p>
           <a:p>
-            <a:pPr indent="0" marL="0">
+            <a:pPr marL="0" indent="0">
               <a:buNone/>
             </a:pPr>
             <a:r>
@@ -7569,7 +7640,7 @@
             <a:endParaRPr lang="en-US" sz="1800" dirty="0"/>
           </a:p>
           <a:p>
-            <a:pPr indent="0" marL="0">
+            <a:pPr marL="0" indent="0">
               <a:buNone/>
             </a:pPr>
             <a:r>
@@ -7586,7 +7657,7 @@
             <a:endParaRPr lang="en-US" sz="1800" dirty="0"/>
           </a:p>
           <a:p>
-            <a:pPr indent="0" marL="0">
+            <a:pPr marL="0" indent="0">
               <a:buNone/>
             </a:pPr>
             <a:r>
@@ -7620,6 +7691,7 @@
         <a:solidFill>
           <a:srgbClr val="F5F7F2"/>
         </a:solidFill>
+        <a:effectLst/>
       </p:bgPr>
     </p:bg>
     <p:spTree>
@@ -7657,11 +7729,11 @@
           <a:bodyPr wrap="square" lIns="0" tIns="0" rIns="0" bIns="0" rtlCol="0" anchor="ctr"/>
           <a:lstStyle/>
           <a:p>
-            <a:pPr indent="0" marL="0">
-              <a:buNone/>
-            </a:pPr>
-            <a:r>
-              <a:rPr lang="en-US" sz="1200" b="1" spc="200" kern="0" dirty="0">
+            <a:pPr marL="0" indent="0">
+              <a:buNone/>
+            </a:pPr>
+            <a:r>
+              <a:rPr lang="en-US" sz="1200" b="1" kern="0" spc="200" dirty="0">
                 <a:solidFill>
                   <a:srgbClr val="174D3B"/>
                 </a:solidFill>
@@ -7696,11 +7768,11 @@
           <a:bodyPr wrap="square" lIns="0" tIns="0" rIns="0" bIns="0" rtlCol="0" anchor="ctr"/>
           <a:lstStyle/>
           <a:p>
-            <a:pPr algn="r" indent="0" marL="0">
-              <a:buNone/>
-            </a:pPr>
-            <a:r>
-              <a:rPr lang="en-US" sz="1000" spc="150" kern="0" dirty="0">
+            <a:pPr marL="0" indent="0" algn="r">
+              <a:buNone/>
+            </a:pPr>
+            <a:r>
+              <a:rPr lang="en-US" sz="1000" kern="0" spc="150" dirty="0">
                 <a:solidFill>
                   <a:srgbClr val="718478"/>
                 </a:solidFill>
@@ -7738,6 +7810,13 @@
             <a:prstDash val="solid"/>
           </a:ln>
         </p:spPr>
+        <p:txBody>
+          <a:bodyPr/>
+          <a:lstStyle/>
+          <a:p>
+            <a:endParaRPr lang="en-US"/>
+          </a:p>
+        </p:txBody>
       </p:sp>
       <p:sp>
         <p:nvSpPr>
@@ -7760,7 +7839,7 @@
           <a:bodyPr wrap="square" lIns="0" tIns="0" rIns="0" bIns="0" rtlCol="0" anchor="ctr"/>
           <a:lstStyle/>
           <a:p>
-            <a:pPr indent="0" marL="0">
+            <a:pPr marL="0" indent="0">
               <a:buNone/>
             </a:pPr>
             <a:r>
@@ -7799,7 +7878,7 @@
           <a:bodyPr wrap="square" lIns="0" tIns="0" rIns="0" bIns="0" rtlCol="0" anchor="ctr"/>
           <a:lstStyle/>
           <a:p>
-            <a:pPr algn="r" indent="0" marL="0">
+            <a:pPr marL="0" indent="0" algn="r">
               <a:buNone/>
             </a:pPr>
             <a:r>
@@ -7838,11 +7917,11 @@
           <a:bodyPr wrap="square" lIns="0" tIns="0" rIns="0" bIns="0" rtlCol="0" anchor="ctr"/>
           <a:lstStyle/>
           <a:p>
-            <a:pPr indent="0" marL="0">
-              <a:buNone/>
-            </a:pPr>
-            <a:r>
-              <a:rPr lang="en-US" sz="1200" b="1" spc="200" kern="0" dirty="0">
+            <a:pPr marL="0" indent="0">
+              <a:buNone/>
+            </a:pPr>
+            <a:r>
+              <a:rPr lang="en-US" sz="1200" b="1" kern="0" spc="200" dirty="0">
                 <a:solidFill>
                   <a:srgbClr val="174D3B"/>
                 </a:solidFill>
@@ -7877,7 +7956,7 @@
           <a:bodyPr wrap="square" lIns="0" tIns="0" rIns="0" bIns="0" rtlCol="0" anchor="ctr"/>
           <a:lstStyle/>
           <a:p>
-            <a:pPr indent="0" marL="0">
+            <a:pPr marL="0" indent="0">
               <a:buNone/>
             </a:pPr>
             <a:r>
@@ -7916,7 +7995,7 @@
           <a:bodyPr wrap="square" lIns="0" tIns="0" rIns="0" bIns="0" rtlCol="0" anchor="ctr"/>
           <a:lstStyle/>
           <a:p>
-            <a:pPr indent="0" marL="0">
+            <a:pPr marL="0" indent="0">
               <a:buNone/>
             </a:pPr>
             <a:r>
@@ -7958,6 +8037,13 @@
             <a:prstDash val="solid"/>
           </a:ln>
         </p:spPr>
+        <p:txBody>
+          <a:bodyPr/>
+          <a:lstStyle/>
+          <a:p>
+            <a:endParaRPr lang="en-US"/>
+          </a:p>
+        </p:txBody>
       </p:sp>
       <p:sp>
         <p:nvSpPr>
@@ -7980,7 +8066,7 @@
           <a:bodyPr wrap="square" lIns="0" tIns="0" rIns="0" bIns="0" rtlCol="0" anchor="ctr"/>
           <a:lstStyle/>
           <a:p>
-            <a:pPr indent="0" marL="0">
+            <a:pPr marL="0" indent="0">
               <a:buNone/>
             </a:pPr>
             <a:r>
@@ -8019,7 +8105,7 @@
           <a:bodyPr wrap="square" lIns="0" tIns="0" rIns="0" bIns="0" rtlCol="0" anchor="ctr"/>
           <a:lstStyle/>
           <a:p>
-            <a:pPr indent="0" marL="0">
+            <a:pPr marL="0" indent="0">
               <a:buNone/>
             </a:pPr>
             <a:r>
@@ -8061,6 +8147,13 @@
             <a:prstDash val="solid"/>
           </a:ln>
         </p:spPr>
+        <p:txBody>
+          <a:bodyPr/>
+          <a:lstStyle/>
+          <a:p>
+            <a:endParaRPr lang="en-US"/>
+          </a:p>
+        </p:txBody>
       </p:sp>
       <p:sp>
         <p:nvSpPr>
@@ -8083,7 +8176,7 @@
           <a:bodyPr wrap="square" lIns="0" tIns="0" rIns="0" bIns="0" rtlCol="0" anchor="ctr"/>
           <a:lstStyle/>
           <a:p>
-            <a:pPr indent="0" marL="0">
+            <a:pPr marL="0" indent="0">
               <a:buNone/>
             </a:pPr>
             <a:r>
@@ -8122,7 +8215,7 @@
           <a:bodyPr wrap="square" lIns="0" tIns="0" rIns="0" bIns="0" rtlCol="0" anchor="ctr"/>
           <a:lstStyle/>
           <a:p>
-            <a:pPr indent="0" marL="0">
+            <a:pPr marL="0" indent="0">
               <a:buNone/>
             </a:pPr>
             <a:r>
@@ -8164,6 +8257,13 @@
             <a:prstDash val="solid"/>
           </a:ln>
         </p:spPr>
+        <p:txBody>
+          <a:bodyPr/>
+          <a:lstStyle/>
+          <a:p>
+            <a:endParaRPr lang="en-US"/>
+          </a:p>
+        </p:txBody>
       </p:sp>
       <p:sp>
         <p:nvSpPr>
@@ -8186,7 +8286,7 @@
           <a:bodyPr wrap="square" lIns="0" tIns="0" rIns="0" bIns="0" rtlCol="0" anchor="ctr"/>
           <a:lstStyle/>
           <a:p>
-            <a:pPr indent="0" marL="0">
+            <a:pPr marL="0" indent="0">
               <a:buNone/>
             </a:pPr>
             <a:r>
@@ -8225,7 +8325,7 @@
           <a:bodyPr wrap="square" lIns="0" tIns="0" rIns="0" bIns="0" rtlCol="0" anchor="ctr"/>
           <a:lstStyle/>
           <a:p>
-            <a:pPr indent="0" marL="0">
+            <a:pPr marL="0" indent="0">
               <a:buNone/>
             </a:pPr>
             <a:r>
@@ -8267,6 +8367,13 @@
             <a:prstDash val="solid"/>
           </a:ln>
         </p:spPr>
+        <p:txBody>
+          <a:bodyPr/>
+          <a:lstStyle/>
+          <a:p>
+            <a:endParaRPr lang="en-US"/>
+          </a:p>
+        </p:txBody>
       </p:sp>
       <p:sp>
         <p:nvSpPr>
@@ -8289,7 +8396,7 @@
           <a:bodyPr wrap="square" lIns="0" tIns="0" rIns="0" bIns="0" rtlCol="0" anchor="ctr"/>
           <a:lstStyle/>
           <a:p>
-            <a:pPr indent="0" marL="0">
+            <a:pPr marL="0" indent="0">
               <a:buNone/>
             </a:pPr>
             <a:r>
@@ -8328,7 +8435,7 @@
           <a:bodyPr wrap="square" lIns="0" tIns="0" rIns="0" bIns="0" rtlCol="0" anchor="ctr"/>
           <a:lstStyle/>
           <a:p>
-            <a:pPr indent="0" marL="0">
+            <a:pPr marL="0" indent="0">
               <a:buNone/>
             </a:pPr>
             <a:r>
@@ -8362,6 +8469,7 @@
         <a:solidFill>
           <a:srgbClr val="112E27"/>
         </a:solidFill>
+        <a:effectLst/>
       </p:bgPr>
     </p:bg>
     <p:spTree>
@@ -8399,11 +8507,11 @@
           <a:bodyPr wrap="square" lIns="0" tIns="0" rIns="0" bIns="0" rtlCol="0" anchor="ctr"/>
           <a:lstStyle/>
           <a:p>
-            <a:pPr indent="0" marL="0">
-              <a:buNone/>
-            </a:pPr>
-            <a:r>
-              <a:rPr lang="en-US" sz="1200" b="1" spc="200" kern="0" dirty="0">
+            <a:pPr marL="0" indent="0">
+              <a:buNone/>
+            </a:pPr>
+            <a:r>
+              <a:rPr lang="en-US" sz="1200" b="1" kern="0" spc="200" dirty="0">
                 <a:solidFill>
                   <a:srgbClr val="D3F783"/>
                 </a:solidFill>
@@ -8438,11 +8546,11 @@
           <a:bodyPr wrap="square" lIns="0" tIns="0" rIns="0" bIns="0" rtlCol="0" anchor="ctr"/>
           <a:lstStyle/>
           <a:p>
-            <a:pPr algn="r" indent="0" marL="0">
-              <a:buNone/>
-            </a:pPr>
-            <a:r>
-              <a:rPr lang="en-US" sz="1000" spc="150" kern="0" dirty="0">
+            <a:pPr marL="0" indent="0" algn="r">
+              <a:buNone/>
+            </a:pPr>
+            <a:r>
+              <a:rPr lang="en-US" sz="1000" kern="0" spc="150" dirty="0">
                 <a:solidFill>
                   <a:srgbClr val="9DB6A8"/>
                 </a:solidFill>
@@ -8480,6 +8588,13 @@
             <a:prstDash val="solid"/>
           </a:ln>
         </p:spPr>
+        <p:txBody>
+          <a:bodyPr/>
+          <a:lstStyle/>
+          <a:p>
+            <a:endParaRPr lang="en-US"/>
+          </a:p>
+        </p:txBody>
       </p:sp>
       <p:sp>
         <p:nvSpPr>
@@ -8502,7 +8617,7 @@
           <a:bodyPr wrap="square" lIns="0" tIns="0" rIns="0" bIns="0" rtlCol="0" anchor="ctr"/>
           <a:lstStyle/>
           <a:p>
-            <a:pPr indent="0" marL="0">
+            <a:pPr marL="0" indent="0">
               <a:buNone/>
             </a:pPr>
             <a:r>
@@ -8541,7 +8656,7 @@
           <a:bodyPr wrap="square" lIns="0" tIns="0" rIns="0" bIns="0" rtlCol="0" anchor="ctr"/>
           <a:lstStyle/>
           <a:p>
-            <a:pPr algn="r" indent="0" marL="0">
+            <a:pPr marL="0" indent="0" algn="r">
               <a:buNone/>
             </a:pPr>
             <a:r>
@@ -8580,7 +8695,7 @@
           <a:bodyPr wrap="square" lIns="0" tIns="0" rIns="0" bIns="0" rtlCol="0" anchor="ctr"/>
           <a:lstStyle/>
           <a:p>
-            <a:pPr indent="0" marL="0">
+            <a:pPr marL="0" indent="0">
               <a:buNone/>
             </a:pPr>
             <a:r>
@@ -8597,7 +8712,7 @@
             <a:endParaRPr lang="en-US" sz="4300" dirty="0"/>
           </a:p>
           <a:p>
-            <a:pPr indent="0" marL="0">
+            <a:pPr marL="0" indent="0">
               <a:buNone/>
             </a:pPr>
             <a:r>
@@ -8636,7 +8751,7 @@
           <a:bodyPr wrap="square" lIns="0" tIns="0" rIns="0" bIns="0" rtlCol="0" anchor="ctr"/>
           <a:lstStyle/>
           <a:p>
-            <a:pPr indent="0" marL="0">
+            <a:pPr marL="0" indent="0">
               <a:buNone/>
             </a:pPr>
             <a:r>
@@ -8675,7 +8790,7 @@
           <a:bodyPr wrap="square" lIns="0" tIns="0" rIns="0" bIns="0" rtlCol="0" anchor="ctr"/>
           <a:lstStyle/>
           <a:p>
-            <a:pPr indent="0" marL="0">
+            <a:pPr marL="0" indent="0">
               <a:buNone/>
             </a:pPr>
             <a:r>
@@ -8692,7 +8807,7 @@
             <a:endParaRPr lang="en-US" sz="2200" dirty="0"/>
           </a:p>
           <a:p>
-            <a:pPr indent="0" marL="0">
+            <a:pPr marL="0" indent="0">
               <a:buNone/>
             </a:pPr>
             <a:r>
@@ -9011,4 +9126,325 @@
     </a:ext>
   </a:extLst>
 </a:theme>
+</file>
+
+<file path=ppt/theme/theme2.xml><?xml version="1.0" encoding="utf-8"?>
+<a:theme xmlns:a="http://schemas.openxmlformats.org/drawingml/2006/main" name="Office Theme">
+  <a:themeElements>
+    <a:clrScheme name="Office">
+      <a:dk1>
+        <a:sysClr val="windowText" lastClr="000000"/>
+      </a:dk1>
+      <a:lt1>
+        <a:sysClr val="window" lastClr="FFFFFF"/>
+      </a:lt1>
+      <a:dk2>
+        <a:srgbClr val="0E2841"/>
+      </a:dk2>
+      <a:lt2>
+        <a:srgbClr val="E8E8E8"/>
+      </a:lt2>
+      <a:accent1>
+        <a:srgbClr val="156082"/>
+      </a:accent1>
+      <a:accent2>
+        <a:srgbClr val="E97132"/>
+      </a:accent2>
+      <a:accent3>
+        <a:srgbClr val="196B24"/>
+      </a:accent3>
+      <a:accent4>
+        <a:srgbClr val="0F9ED5"/>
+      </a:accent4>
+      <a:accent5>
+        <a:srgbClr val="A02B93"/>
+      </a:accent5>
+      <a:accent6>
+        <a:srgbClr val="4EA72E"/>
+      </a:accent6>
+      <a:hlink>
+        <a:srgbClr val="467886"/>
+      </a:hlink>
+      <a:folHlink>
+        <a:srgbClr val="96607D"/>
+      </a:folHlink>
+    </a:clrScheme>
+    <a:fontScheme name="Office">
+      <a:majorFont>
+        <a:latin typeface="Aptos Display" panose="02110004020202020204"/>
+        <a:ea typeface=""/>
+        <a:cs typeface=""/>
+        <a:font script="Jpan" typeface="游ゴシック Light"/>
+        <a:font script="Hang" typeface="맑은 고딕"/>
+        <a:font script="Hans" typeface="等线 Light"/>
+        <a:font script="Hant" typeface="新細明體"/>
+        <a:font script="Arab" typeface="Times New Roman"/>
+        <a:font script="Hebr" typeface="Times New Roman"/>
+        <a:font script="Thai" typeface="Angsana New"/>
+        <a:font script="Ethi" typeface="Nyala"/>
+        <a:font script="Beng" typeface="Vrinda"/>
+        <a:font script="Gujr" typeface="Shruti"/>
+        <a:font script="Khmr" typeface="MoolBoran"/>
+        <a:font script="Knda" typeface="Tunga"/>
+        <a:font script="Guru" typeface="Raavi"/>
+        <a:font script="Cans" typeface="Euphemia"/>
+        <a:font script="Cher" typeface="Plantagenet Cherokee"/>
+        <a:font script="Yiii" typeface="Microsoft Yi Baiti"/>
+        <a:font script="Tibt" typeface="Microsoft Himalaya"/>
+        <a:font script="Thaa" typeface="MV Boli"/>
+        <a:font script="Deva" typeface="Mangal"/>
+        <a:font script="Telu" typeface="Gautami"/>
+        <a:font script="Taml" typeface="Latha"/>
+        <a:font script="Syrc" typeface="Estrangelo Edessa"/>
+        <a:font script="Orya" typeface="Kalinga"/>
+        <a:font script="Mlym" typeface="Kartika"/>
+        <a:font script="Laoo" typeface="DokChampa"/>
+        <a:font script="Sinh" typeface="Iskoola Pota"/>
+        <a:font script="Mong" typeface="Mongolian Baiti"/>
+        <a:font script="Viet" typeface="Times New Roman"/>
+        <a:font script="Uigh" typeface="Microsoft Uighur"/>
+        <a:font script="Geor" typeface="Sylfaen"/>
+        <a:font script="Armn" typeface="Arial"/>
+        <a:font script="Bugi" typeface="Leelawadee UI"/>
+        <a:font script="Bopo" typeface="Microsoft JhengHei"/>
+        <a:font script="Java" typeface="Javanese Text"/>
+        <a:font script="Lisu" typeface="Segoe UI"/>
+        <a:font script="Mymr" typeface="Myanmar Text"/>
+        <a:font script="Nkoo" typeface="Ebrima"/>
+        <a:font script="Olck" typeface="Nirmala UI"/>
+        <a:font script="Osma" typeface="Ebrima"/>
+        <a:font script="Phag" typeface="Phagspa"/>
+        <a:font script="Syrn" typeface="Estrangelo Edessa"/>
+        <a:font script="Syrj" typeface="Estrangelo Edessa"/>
+        <a:font script="Syre" typeface="Estrangelo Edessa"/>
+        <a:font script="Sora" typeface="Nirmala UI"/>
+        <a:font script="Tale" typeface="Microsoft Tai Le"/>
+        <a:font script="Talu" typeface="Microsoft New Tai Lue"/>
+        <a:font script="Tfng" typeface="Ebrima"/>
+      </a:majorFont>
+      <a:minorFont>
+        <a:latin typeface="Aptos" panose="02110004020202020204"/>
+        <a:ea typeface=""/>
+        <a:cs typeface=""/>
+        <a:font script="Jpan" typeface="游ゴシック"/>
+        <a:font script="Hang" typeface="맑은 고딕"/>
+        <a:font script="Hans" typeface="等线"/>
+        <a:font script="Hant" typeface="新細明體"/>
+        <a:font script="Arab" typeface="Arial"/>
+        <a:font script="Hebr" typeface="Arial"/>
+        <a:font script="Thai" typeface="Cordia New"/>
+        <a:font script="Ethi" typeface="Nyala"/>
+        <a:font script="Beng" typeface="Vrinda"/>
+        <a:font script="Gujr" typeface="Shruti"/>
+        <a:font script="Khmr" typeface="DaunPenh"/>
+        <a:font script="Knda" typeface="Tunga"/>
+        <a:font script="Guru" typeface="Raavi"/>
+        <a:font script="Cans" typeface="Euphemia"/>
+        <a:font script="Cher" typeface="Plantagenet Cherokee"/>
+        <a:font script="Yiii" typeface="Microsoft Yi Baiti"/>
+        <a:font script="Tibt" typeface="Microsoft Himalaya"/>
+        <a:font script="Thaa" typeface="MV Boli"/>
+        <a:font script="Deva" typeface="Mangal"/>
+        <a:font script="Telu" typeface="Gautami"/>
+        <a:font script="Taml" typeface="Latha"/>
+        <a:font script="Syrc" typeface="Estrangelo Edessa"/>
+        <a:font script="Orya" typeface="Kalinga"/>
+        <a:font script="Mlym" typeface="Kartika"/>
+        <a:font script="Laoo" typeface="DokChampa"/>
+        <a:font script="Sinh" typeface="Iskoola Pota"/>
+        <a:font script="Mong" typeface="Mongolian Baiti"/>
+        <a:font script="Viet" typeface="Arial"/>
+        <a:font script="Uigh" typeface="Microsoft Uighur"/>
+        <a:font script="Geor" typeface="Sylfaen"/>
+        <a:font script="Armn" typeface="Arial"/>
+        <a:font script="Bugi" typeface="Leelawadee UI"/>
+        <a:font script="Bopo" typeface="Microsoft JhengHei"/>
+        <a:font script="Java" typeface="Javanese Text"/>
+        <a:font script="Lisu" typeface="Segoe UI"/>
+        <a:font script="Mymr" typeface="Myanmar Text"/>
+        <a:font script="Nkoo" typeface="Ebrima"/>
+        <a:font script="Olck" typeface="Nirmala UI"/>
+        <a:font script="Osma" typeface="Ebrima"/>
+        <a:font script="Phag" typeface="Phagspa"/>
+        <a:font script="Syrn" typeface="Estrangelo Edessa"/>
+        <a:font script="Syrj" typeface="Estrangelo Edessa"/>
+        <a:font script="Syre" typeface="Estrangelo Edessa"/>
+        <a:font script="Sora" typeface="Nirmala UI"/>
+        <a:font script="Tale" typeface="Microsoft Tai Le"/>
+        <a:font script="Talu" typeface="Microsoft New Tai Lue"/>
+        <a:font script="Tfng" typeface="Ebrima"/>
+      </a:minorFont>
+    </a:fontScheme>
+    <a:fmtScheme name="Office">
+      <a:fillStyleLst>
+        <a:solidFill>
+          <a:schemeClr val="phClr"/>
+        </a:solidFill>
+        <a:gradFill rotWithShape="1">
+          <a:gsLst>
+            <a:gs pos="0">
+              <a:schemeClr val="phClr">
+                <a:lumMod val="110000"/>
+                <a:satMod val="105000"/>
+                <a:tint val="67000"/>
+              </a:schemeClr>
+            </a:gs>
+            <a:gs pos="50000">
+              <a:schemeClr val="phClr">
+                <a:lumMod val="105000"/>
+                <a:satMod val="103000"/>
+                <a:tint val="73000"/>
+              </a:schemeClr>
+            </a:gs>
+            <a:gs pos="100000">
+              <a:schemeClr val="phClr">
+                <a:lumMod val="105000"/>
+                <a:satMod val="109000"/>
+                <a:tint val="81000"/>
+              </a:schemeClr>
+            </a:gs>
+          </a:gsLst>
+          <a:lin ang="5400000" scaled="0"/>
+        </a:gradFill>
+        <a:gradFill rotWithShape="1">
+          <a:gsLst>
+            <a:gs pos="0">
+              <a:schemeClr val="phClr">
+                <a:satMod val="103000"/>
+                <a:lumMod val="102000"/>
+                <a:tint val="94000"/>
+              </a:schemeClr>
+            </a:gs>
+            <a:gs pos="50000">
+              <a:schemeClr val="phClr">
+                <a:satMod val="110000"/>
+                <a:lumMod val="100000"/>
+                <a:shade val="100000"/>
+              </a:schemeClr>
+            </a:gs>
+            <a:gs pos="100000">
+              <a:schemeClr val="phClr">
+                <a:lumMod val="99000"/>
+                <a:satMod val="120000"/>
+                <a:shade val="78000"/>
+              </a:schemeClr>
+            </a:gs>
+          </a:gsLst>
+          <a:lin ang="5400000" scaled="0"/>
+        </a:gradFill>
+      </a:fillStyleLst>
+      <a:lnStyleLst>
+        <a:ln w="12700" cap="flat" cmpd="sng" algn="ctr">
+          <a:solidFill>
+            <a:schemeClr val="phClr"/>
+          </a:solidFill>
+          <a:prstDash val="solid"/>
+          <a:miter lim="800000"/>
+        </a:ln>
+        <a:ln w="19050" cap="flat" cmpd="sng" algn="ctr">
+          <a:solidFill>
+            <a:schemeClr val="phClr"/>
+          </a:solidFill>
+          <a:prstDash val="solid"/>
+          <a:miter lim="800000"/>
+        </a:ln>
+        <a:ln w="25400" cap="flat" cmpd="sng" algn="ctr">
+          <a:solidFill>
+            <a:schemeClr val="phClr"/>
+          </a:solidFill>
+          <a:prstDash val="solid"/>
+          <a:miter lim="800000"/>
+        </a:ln>
+      </a:lnStyleLst>
+      <a:effectStyleLst>
+        <a:effectStyle>
+          <a:effectLst/>
+        </a:effectStyle>
+        <a:effectStyle>
+          <a:effectLst/>
+        </a:effectStyle>
+        <a:effectStyle>
+          <a:effectLst>
+            <a:outerShdw blurRad="57150" dist="19050" dir="5400000" algn="ctr" rotWithShape="0">
+              <a:srgbClr val="000000">
+                <a:alpha val="63000"/>
+              </a:srgbClr>
+            </a:outerShdw>
+          </a:effectLst>
+        </a:effectStyle>
+      </a:effectStyleLst>
+      <a:bgFillStyleLst>
+        <a:solidFill>
+          <a:schemeClr val="phClr"/>
+        </a:solidFill>
+        <a:solidFill>
+          <a:schemeClr val="phClr">
+            <a:tint val="95000"/>
+            <a:satMod val="170000"/>
+          </a:schemeClr>
+        </a:solidFill>
+        <a:gradFill rotWithShape="1">
+          <a:gsLst>
+            <a:gs pos="0">
+              <a:schemeClr val="phClr">
+                <a:tint val="93000"/>
+                <a:satMod val="150000"/>
+                <a:shade val="98000"/>
+                <a:lumMod val="102000"/>
+              </a:schemeClr>
+            </a:gs>
+            <a:gs pos="50000">
+              <a:schemeClr val="phClr">
+                <a:tint val="98000"/>
+                <a:satMod val="130000"/>
+                <a:shade val="90000"/>
+                <a:lumMod val="103000"/>
+              </a:schemeClr>
+            </a:gs>
+            <a:gs pos="100000">
+              <a:schemeClr val="phClr">
+                <a:shade val="63000"/>
+                <a:satMod val="120000"/>
+              </a:schemeClr>
+            </a:gs>
+          </a:gsLst>
+          <a:lin ang="5400000" scaled="0"/>
+        </a:gradFill>
+      </a:bgFillStyleLst>
+    </a:fmtScheme>
+  </a:themeElements>
+  <a:objectDefaults>
+    <a:lnDef>
+      <a:spPr/>
+      <a:bodyPr/>
+      <a:lstStyle/>
+      <a:style>
+        <a:lnRef idx="2">
+          <a:schemeClr val="accent1"/>
+        </a:lnRef>
+        <a:fillRef idx="0">
+          <a:schemeClr val="accent1"/>
+        </a:fillRef>
+        <a:effectRef idx="1">
+          <a:schemeClr val="accent1"/>
+        </a:effectRef>
+        <a:fontRef idx="minor">
+          <a:schemeClr val="tx1"/>
+        </a:fontRef>
+      </a:style>
+    </a:lnDef>
+  </a:objectDefaults>
+  <a:extraClrSchemeLst/>
+  <a:extLst>
+    <a:ext uri="{05A4C25C-085E-4340-85A3-A5531E510DB2}">
+      <thm15:themeFamily xmlns:thm15="http://schemas.microsoft.com/office/thememl/2012/main" name="Office Theme" id="{2E142A2C-CD16-42D6-873A-C26D2A0506FA}" vid="{1BDDFF52-6CD6-40A5-AB3C-68EB2F1E4D0A}"/>
+    </a:ext>
+  </a:extLst>
+</a:theme>
+</file>
+
+<file path=docMetadata/LabelInfo.xml><?xml version="1.0" encoding="utf-8"?>
+<clbl:labelList xmlns:clbl="http://schemas.microsoft.com/office/2020/mipLabelMetadata">
+  <clbl:label id="{1cf2ba15-c468-47c8-b178-cba8acf110ec}" enabled="1" method="Standard" siteId="{eb25818e-5bd5-49bf-99de-53e3e7b42630}" contentBits="0" removed="0"/>
+</clbl:labelList>
 </file>